--- a/stage1_classic_ml/04_decision_trees/Lecture-4-Decision-Trees.pptx
+++ b/stage1_classic_ml/04_decision_trees/Lecture-4-Decision-Trees.pptx
@@ -27,6 +27,8 @@
     <p:sldId id="269" r:id="rId25"/>
     <p:sldId id="270" r:id="rId26"/>
     <p:sldId id="271" r:id="rId27"/>
+    <p:sldId id="272" r:id="rId28"/>
+    <p:sldId id="273" r:id="rId29"/>
   </p:sldIdLst>
   <p:sldSz cx="12188825" cy="6858000"/>
   <p:notesSz cx="7010400" cy="9296400"/>
@@ -8397,12 +8399,12 @@
       <p:grpSpPr/>
       <p:sp>
         <p:nvSpPr>
-          <p:cNvPr id="2" name="Text Placeholder 1"/>
+          <p:cNvPr id="2" name="Title 1"/>
           <p:cNvSpPr>
             <a:spLocks noGrp="1"/>
           </p:cNvSpPr>
           <p:nvPr>
-            <p:ph type="body" idx="13" sz="quarter"/>
+            <p:ph type="title"/>
           </p:nvPr>
         </p:nvSpPr>
         <p:spPr/>
@@ -8411,37 +8413,35 @@
           <a:lstStyle/>
           <a:p>
             <a:r>
-              <a:t>Overfitting &amp;</a:t>
-            </a:r>
-          </a:p>
-          <a:p>
-            <a:r>
-              <a:t>Tree Depth</a:t>
-            </a:r>
-          </a:p>
-        </p:txBody>
-      </p:sp>
-      <p:sp>
-        <p:nvSpPr>
-          <p:cNvPr id="3" name="Text Placeholder 2"/>
-          <p:cNvSpPr>
-            <a:spLocks noGrp="1"/>
-          </p:cNvSpPr>
-          <p:nvPr>
-            <p:ph type="body" idx="16" sz="quarter"/>
-          </p:nvPr>
-        </p:nvSpPr>
-        <p:spPr/>
-        <p:txBody>
-          <a:bodyPr/>
-          <a:lstStyle/>
-          <a:p>
-            <a:r>
-              <a:t>04</a:t>
-            </a:r>
-          </a:p>
-        </p:txBody>
-      </p:sp>
+              <a:t>Attack Signatures in Network Features</a:t>
+            </a:r>
+          </a:p>
+        </p:txBody>
+      </p:sp>
+      <p:pic>
+        <p:nvPicPr>
+          <p:cNvPr id="3" name="Picture 2" descr="dt_attacks.png"/>
+          <p:cNvPicPr>
+            <a:picLocks noChangeAspect="1"/>
+          </p:cNvPicPr>
+          <p:nvPr/>
+        </p:nvPicPr>
+        <p:blipFill>
+          <a:blip r:embed="rId2"/>
+          <a:stretch>
+            <a:fillRect/>
+          </a:stretch>
+        </p:blipFill>
+        <p:spPr>
+          <a:xfrm>
+            <a:off x="274320" y="1371600"/>
+            <a:ext cx="11430000" cy="4159541"/>
+          </a:xfrm>
+          <a:prstGeom prst="rect">
+            <a:avLst/>
+          </a:prstGeom>
+        </p:spPr>
+      </p:pic>
     </p:spTree>
   </p:cSld>
   <p:clrMapOvr>
@@ -8476,75 +8476,35 @@
           <a:lstStyle/>
           <a:p>
             <a:r>
-              <a:t>Overfitting — The Tree's Weakness</a:t>
-            </a:r>
-          </a:p>
-        </p:txBody>
-      </p:sp>
-      <p:sp>
-        <p:nvSpPr>
-          <p:cNvPr id="3" name="Content Placeholder 2"/>
-          <p:cNvSpPr>
-            <a:spLocks noGrp="1"/>
-          </p:cNvSpPr>
-          <p:nvPr>
-            <p:ph idx="1"/>
-          </p:nvPr>
-        </p:nvSpPr>
-        <p:spPr/>
-        <p:txBody>
-          <a:bodyPr/>
-          <a:lstStyle/>
-          <a:p>
-            <a:pPr/>
-            <a:r>
-              <a:t>An unconstrained tree memorises the training data perfectly</a:t>
-            </a:r>
-          </a:p>
-          <a:p>
-            <a:pPr lvl="1"/>
-            <a:r>
-              <a:t>It creates a rule for every edge case — perfect training accuracy</a:t>
-            </a:r>
-          </a:p>
-          <a:p>
-            <a:pPr lvl="1"/>
-            <a:r>
-              <a:t>But fails on new data — poor test accuracy</a:t>
-            </a:r>
-          </a:p>
-          <a:p>
-            <a:pPr/>
-            <a:r>
-              <a:t>Control overfitting with hyperparameters:</a:t>
-            </a:r>
-          </a:p>
-          <a:p>
-            <a:pPr lvl="1"/>
-            <a:r>
-              <a:t>max_depth — limits how deep the tree grows</a:t>
-            </a:r>
-          </a:p>
-          <a:p>
-            <a:pPr lvl="1"/>
-            <a:r>
-              <a:t>min_samples_split — minimum samples needed to create a new split</a:t>
-            </a:r>
-          </a:p>
-          <a:p>
-            <a:pPr/>
-            <a:r>
-              <a:t>Finding the right max_depth is the key tuning task</a:t>
-            </a:r>
-          </a:p>
-          <a:p>
-            <a:pPr/>
-            <a:r>
-              <a:t>Too shallow → underfitting. Too deep → overfitting.</a:t>
-            </a:r>
-          </a:p>
-        </p:txBody>
-      </p:sp>
+              <a:t>Feature Importance — Which Network Features Matter Most?</a:t>
+            </a:r>
+          </a:p>
+        </p:txBody>
+      </p:sp>
+      <p:pic>
+        <p:nvPicPr>
+          <p:cNvPr id="3" name="Picture 2" descr="dt_importance.png"/>
+          <p:cNvPicPr>
+            <a:picLocks noChangeAspect="1"/>
+          </p:cNvPicPr>
+          <p:nvPr/>
+        </p:nvPicPr>
+        <p:blipFill>
+          <a:blip r:embed="rId2"/>
+          <a:stretch>
+            <a:fillRect/>
+          </a:stretch>
+        </p:blipFill>
+        <p:spPr>
+          <a:xfrm>
+            <a:off x="2011680" y="1371600"/>
+            <a:ext cx="8229600" cy="4507893"/>
+          </a:xfrm>
+          <a:prstGeom prst="rect">
+            <a:avLst/>
+          </a:prstGeom>
+        </p:spPr>
+      </p:pic>
     </p:spTree>
   </p:cSld>
   <p:clrMapOvr>
@@ -8565,12 +8525,12 @@
       <p:grpSpPr/>
       <p:sp>
         <p:nvSpPr>
-          <p:cNvPr id="2" name="Title 1"/>
+          <p:cNvPr id="2" name="Text Placeholder 1"/>
           <p:cNvSpPr>
             <a:spLocks noGrp="1"/>
           </p:cNvSpPr>
           <p:nvPr>
-            <p:ph type="title"/>
+            <p:ph type="body" idx="13" sz="quarter"/>
           </p:nvPr>
         </p:nvSpPr>
         <p:spPr/>
@@ -8579,19 +8539,24 @@
           <a:lstStyle/>
           <a:p>
             <a:r>
-              <a:t>Why Decision Trees Matter in Security</a:t>
-            </a:r>
-          </a:p>
-        </p:txBody>
-      </p:sp>
-      <p:sp>
-        <p:nvSpPr>
-          <p:cNvPr id="3" name="Content Placeholder 2"/>
+              <a:t>Overfitting &amp;</a:t>
+            </a:r>
+          </a:p>
+          <a:p>
+            <a:r>
+              <a:t>Tree Depth</a:t>
+            </a:r>
+          </a:p>
+        </p:txBody>
+      </p:sp>
+      <p:sp>
+        <p:nvSpPr>
+          <p:cNvPr id="3" name="Text Placeholder 2"/>
           <p:cNvSpPr>
             <a:spLocks noGrp="1"/>
           </p:cNvSpPr>
           <p:nvPr>
-            <p:ph idx="1"/>
+            <p:ph type="body" idx="16" sz="quarter"/>
           </p:nvPr>
         </p:nvSpPr>
         <p:spPr/>
@@ -8599,45 +8564,8 @@
           <a:bodyPr/>
           <a:lstStyle/>
           <a:p>
-            <a:pPr/>
-            <a:r>
-              <a:t>1. Interpretable — you can explain exactly why a connection was flagged</a:t>
-            </a:r>
-          </a:p>
-          <a:p>
-            <a:pPr/>
-            <a:r>
-              <a:t>2. No feature scaling needed — unlike logistic regression</a:t>
-            </a:r>
-          </a:p>
-          <a:p>
-            <a:pPr/>
-            <a:r>
-              <a:t>3. Handles non-linear patterns — complex threshold combinations</a:t>
-            </a:r>
-          </a:p>
-          <a:p>
-            <a:pPr/>
-            <a:r>
-              <a:t>4. Basis for Random Forests (Stage 2) — ensemble of many trees</a:t>
-            </a:r>
-          </a:p>
-          <a:p>
-            <a:pPr/>
-            <a:r>
-              <a:t>5. Can visualise the entire model:</a:t>
-            </a:r>
-          </a:p>
-          <a:p>
-            <a:pPr lvl="1"/>
-            <a:r>
-              <a:t>plot_tree(model, feature_names=..., class_names=..., filled=True)</a:t>
-            </a:r>
-          </a:p>
-          <a:p>
-            <a:pPr lvl="1"/>
-            <a:r>
-              <a:t>The result is a readable flowchart of learned rules</a:t>
+            <a:r>
+              <a:t>04</a:t>
             </a:r>
           </a:p>
         </p:txBody>
@@ -8662,12 +8590,12 @@
       <p:grpSpPr/>
       <p:sp>
         <p:nvSpPr>
-          <p:cNvPr id="2" name="Text Placeholder 1"/>
+          <p:cNvPr id="2" name="Title 1"/>
           <p:cNvSpPr>
             <a:spLocks noGrp="1"/>
           </p:cNvSpPr>
           <p:nvPr>
-            <p:ph type="body" idx="13" sz="quarter"/>
+            <p:ph type="title"/>
           </p:nvPr>
         </p:nvSpPr>
         <p:spPr/>
@@ -8676,32 +8604,35 @@
           <a:lstStyle/>
           <a:p>
             <a:r>
-              <a:t>Workshop</a:t>
-            </a:r>
-          </a:p>
-        </p:txBody>
-      </p:sp>
-      <p:sp>
-        <p:nvSpPr>
-          <p:cNvPr id="3" name="Text Placeholder 2"/>
-          <p:cNvSpPr>
-            <a:spLocks noGrp="1"/>
-          </p:cNvSpPr>
-          <p:nvPr>
-            <p:ph type="body" idx="16" sz="quarter"/>
-          </p:nvPr>
-        </p:nvSpPr>
-        <p:spPr/>
-        <p:txBody>
-          <a:bodyPr/>
-          <a:lstStyle/>
-          <a:p>
-            <a:r>
-              <a:t>05</a:t>
-            </a:r>
-          </a:p>
-        </p:txBody>
-      </p:sp>
+              <a:t>Overfitting — Train vs Test Accuracy at Different Depths</a:t>
+            </a:r>
+          </a:p>
+        </p:txBody>
+      </p:sp>
+      <p:pic>
+        <p:nvPicPr>
+          <p:cNvPr id="3" name="Picture 2" descr="dt_overfitting.png"/>
+          <p:cNvPicPr>
+            <a:picLocks noChangeAspect="1"/>
+          </p:cNvPicPr>
+          <p:nvPr/>
+        </p:nvPicPr>
+        <p:blipFill>
+          <a:blip r:embed="rId2"/>
+          <a:stretch>
+            <a:fillRect/>
+          </a:stretch>
+        </p:blipFill>
+        <p:spPr>
+          <a:xfrm>
+            <a:off x="2011680" y="1371600"/>
+            <a:ext cx="8229600" cy="4992530"/>
+          </a:xfrm>
+          <a:prstGeom prst="rect">
+            <a:avLst/>
+          </a:prstGeom>
+        </p:spPr>
+      </p:pic>
     </p:spTree>
   </p:cSld>
   <p:clrMapOvr>
@@ -8736,7 +8667,7 @@
           <a:lstStyle/>
           <a:p>
             <a:r>
-              <a:t>Workshop — 4 Exercises</a:t>
+              <a:t>Controlling Overfitting</a:t>
             </a:r>
           </a:p>
         </p:txBody>
@@ -8748,7 +8679,7 @@
             <a:spLocks noGrp="1"/>
           </p:cNvSpPr>
           <p:nvPr>
-            <p:ph idx="1"/>
+            <p:ph idx="2" sz="half"/>
           </p:nvPr>
         </p:nvSpPr>
         <p:spPr/>
@@ -8758,49 +8689,98 @@
           <a:p>
             <a:pPr/>
             <a:r>
-              <a:t>Exercise 1: How trees make decisions — Gini impurity, information gain</a:t>
+              <a:t>Too Deep (overfitting)</a:t>
             </a:r>
           </a:p>
           <a:p>
             <a:pPr/>
-            <a:r>
-              <a:t>Exercise 2: Train and read the tree — plot_tree(), interpret learned rules</a:t>
-            </a:r>
           </a:p>
           <a:p>
             <a:pPr/>
             <a:r>
-              <a:t>Exercise 3: Feature importance — which network features matter most</a:t>
+              <a:t>Memorises training data perfectly</a:t>
             </a:r>
           </a:p>
           <a:p>
             <a:pPr/>
             <a:r>
-              <a:t>Exercise 4: Depth and overfitting — max_depth sweep, train vs test accuracy</a:t>
+              <a:t>Creates a rule for every edge case</a:t>
             </a:r>
           </a:p>
           <a:p>
             <a:pPr/>
             <a:r>
-              <a:t>Each exercise has:</a:t>
-            </a:r>
-          </a:p>
-          <a:p>
-            <a:pPr lvl="1"/>
-            <a:r>
-              <a:t>lecture.md — concept explanation</a:t>
-            </a:r>
-          </a:p>
-          <a:p>
-            <a:pPr lvl="1"/>
-            <a:r>
-              <a:t>handson.md — step-by-step lab</a:t>
-            </a:r>
-          </a:p>
-          <a:p>
-            <a:pPr lvl="1"/>
-            <a:r>
-              <a:t>solution_decision_trees.py — reference implementation</a:t>
+              <a:t>Perfect training accuracy</a:t>
+            </a:r>
+          </a:p>
+          <a:p>
+            <a:pPr/>
+            <a:r>
+              <a:t>Poor test accuracy</a:t>
+            </a:r>
+          </a:p>
+          <a:p>
+            <a:pPr/>
+            <a:r>
+              <a:t>The gap widens with depth</a:t>
+            </a:r>
+          </a:p>
+        </p:txBody>
+      </p:sp>
+      <p:sp>
+        <p:nvSpPr>
+          <p:cNvPr id="4" name="Content Placeholder 3"/>
+          <p:cNvSpPr>
+            <a:spLocks noGrp="1"/>
+          </p:cNvSpPr>
+          <p:nvPr>
+            <p:ph idx="12" sz="half"/>
+          </p:nvPr>
+        </p:nvSpPr>
+        <p:spPr/>
+        <p:txBody>
+          <a:bodyPr/>
+          <a:lstStyle/>
+          <a:p>
+            <a:pPr/>
+            <a:r>
+              <a:t>Controls</a:t>
+            </a:r>
+          </a:p>
+          <a:p>
+            <a:pPr/>
+          </a:p>
+          <a:p>
+            <a:pPr/>
+            <a:r>
+              <a:t>max_depth — limits tree growth</a:t>
+            </a:r>
+          </a:p>
+          <a:p>
+            <a:pPr/>
+            <a:r>
+              <a:t>min_samples_split — minimum samples to split</a:t>
+            </a:r>
+          </a:p>
+          <a:p>
+            <a:pPr/>
+          </a:p>
+          <a:p>
+            <a:pPr/>
+            <a:r>
+              <a:t>Finding the sweet spot is the key task</a:t>
+            </a:r>
+          </a:p>
+          <a:p>
+            <a:pPr/>
+            <a:r>
+              <a:t>Too shallow = underfitting</a:t>
+            </a:r>
+          </a:p>
+          <a:p>
+            <a:pPr/>
+            <a:r>
+              <a:t>Too deep = overfitting</a:t>
             </a:r>
           </a:p>
         </p:txBody>
@@ -8830,7 +8810,7 @@
             <a:spLocks noGrp="1"/>
           </p:cNvSpPr>
           <p:nvPr>
-            <p:ph type="body" idx="12" sz="quarter"/>
+            <p:ph type="body" idx="13" sz="quarter"/>
           </p:nvPr>
         </p:nvSpPr>
         <p:spPr/>
@@ -8838,57 +8818,20 @@
           <a:bodyPr/>
           <a:lstStyle/>
           <a:p>
-            <a:pPr/>
-            <a:r>
-              <a:t>Decision trees learn if/else rules from data — no hand-crafting needed</a:t>
-            </a:r>
-          </a:p>
-          <a:p>
-            <a:pPr/>
-            <a:r>
-              <a:t>Splits are chosen by Gini impurity to maximise class separation</a:t>
-            </a:r>
-          </a:p>
-          <a:p>
-            <a:pPr/>
-            <a:r>
-              <a:t>feature_importances_ reveals which inputs drive the model's decisions</a:t>
-            </a:r>
-          </a:p>
-          <a:p>
-            <a:pPr/>
-            <a:r>
-              <a:t>max_depth controls the overfitting/underfitting tradeoff</a:t>
-            </a:r>
-          </a:p>
-          <a:p>
-            <a:pPr/>
-            <a:r>
-              <a:t>Trees are interpretable, need no scaling, and handle non-linear patterns</a:t>
-            </a:r>
-          </a:p>
-          <a:p>
-            <a:pPr/>
-            <a:r>
-              <a:t>They are the building block for Random Forests in Stage 2</a:t>
-            </a:r>
-          </a:p>
-          <a:p>
-            <a:pPr/>
-            <a:r>
-              <a:t>Next: Lesson 1.5 — Model Evaluation</a:t>
-            </a:r>
-          </a:p>
-        </p:txBody>
-      </p:sp>
-      <p:sp>
-        <p:nvSpPr>
-          <p:cNvPr id="3" name="Title 2"/>
+            <a:r>
+              <a:t>Workshop</a:t>
+            </a:r>
+          </a:p>
+        </p:txBody>
+      </p:sp>
+      <p:sp>
+        <p:nvSpPr>
+          <p:cNvPr id="3" name="Text Placeholder 2"/>
           <p:cNvSpPr>
             <a:spLocks noGrp="1"/>
           </p:cNvSpPr>
           <p:nvPr>
-            <p:ph type="title"/>
+            <p:ph type="body" idx="16" sz="quarter"/>
           </p:nvPr>
         </p:nvSpPr>
         <p:spPr/>
@@ -8897,7 +8840,7 @@
           <a:lstStyle/>
           <a:p>
             <a:r>
-              <a:t>Summary</a:t>
+              <a:t>05</a:t>
             </a:r>
           </a:p>
         </p:txBody>
@@ -8922,6 +8865,191 @@
       <p:grpSpPr/>
       <p:sp>
         <p:nvSpPr>
+          <p:cNvPr id="2" name="Title 1"/>
+          <p:cNvSpPr>
+            <a:spLocks noGrp="1"/>
+          </p:cNvSpPr>
+          <p:nvPr>
+            <p:ph type="title"/>
+          </p:nvPr>
+        </p:nvSpPr>
+        <p:spPr/>
+        <p:txBody>
+          <a:bodyPr/>
+          <a:lstStyle/>
+          <a:p>
+            <a:r>
+              <a:t>Workshop — 4 Exercises</a:t>
+            </a:r>
+          </a:p>
+        </p:txBody>
+      </p:sp>
+      <p:sp>
+        <p:nvSpPr>
+          <p:cNvPr id="3" name="Content Placeholder 2"/>
+          <p:cNvSpPr>
+            <a:spLocks noGrp="1"/>
+          </p:cNvSpPr>
+          <p:nvPr>
+            <p:ph idx="1"/>
+          </p:nvPr>
+        </p:nvSpPr>
+        <p:spPr/>
+        <p:txBody>
+          <a:bodyPr/>
+          <a:lstStyle/>
+          <a:p>
+            <a:pPr/>
+            <a:r>
+              <a:t>Exercise 1: How trees make decisions — Gini impurity, information gain</a:t>
+            </a:r>
+          </a:p>
+          <a:p>
+            <a:pPr/>
+            <a:r>
+              <a:t>Exercise 2: Train and read the tree — plot_tree(), interpret learned rules</a:t>
+            </a:r>
+          </a:p>
+          <a:p>
+            <a:pPr/>
+            <a:r>
+              <a:t>Exercise 3: Feature importance — which network features matter most</a:t>
+            </a:r>
+          </a:p>
+          <a:p>
+            <a:pPr/>
+            <a:r>
+              <a:t>Exercise 4: Depth and overfitting — max_depth sweep, train vs test accuracy</a:t>
+            </a:r>
+          </a:p>
+          <a:p>
+            <a:pPr/>
+          </a:p>
+          <a:p>
+            <a:pPr/>
+            <a:r>
+              <a:t>Each exercise: lecture.md → handson.md → solution_decision_trees.py</a:t>
+            </a:r>
+          </a:p>
+        </p:txBody>
+      </p:sp>
+    </p:spTree>
+  </p:cSld>
+  <p:clrMapOvr>
+    <a:masterClrMapping/>
+  </p:clrMapOvr>
+</p:sld>
+</file>
+
+<file path=ppt/slides/slide17.xml><?xml version="1.0" encoding="utf-8"?>
+<p:sld xmlns:a="http://schemas.openxmlformats.org/drawingml/2006/main" xmlns:p="http://schemas.openxmlformats.org/presentationml/2006/main" xmlns:r="http://schemas.openxmlformats.org/officeDocument/2006/relationships">
+  <p:cSld>
+    <p:spTree>
+      <p:nvGrpSpPr>
+        <p:cNvPr id="1" name=""/>
+        <p:cNvGrpSpPr/>
+        <p:nvPr/>
+      </p:nvGrpSpPr>
+      <p:grpSpPr/>
+      <p:sp>
+        <p:nvSpPr>
+          <p:cNvPr id="2" name="Text Placeholder 1"/>
+          <p:cNvSpPr>
+            <a:spLocks noGrp="1"/>
+          </p:cNvSpPr>
+          <p:nvPr>
+            <p:ph type="body" idx="12" sz="quarter"/>
+          </p:nvPr>
+        </p:nvSpPr>
+        <p:spPr/>
+        <p:txBody>
+          <a:bodyPr/>
+          <a:lstStyle/>
+          <a:p>
+            <a:pPr/>
+            <a:r>
+              <a:t>Decision trees learn if/else rules from data — no hand-crafting needed</a:t>
+            </a:r>
+          </a:p>
+          <a:p>
+            <a:pPr/>
+            <a:r>
+              <a:t>Splits are chosen by Gini impurity to maximise class separation</a:t>
+            </a:r>
+          </a:p>
+          <a:p>
+            <a:pPr/>
+            <a:r>
+              <a:t>feature_importances_ reveals which inputs drive the model's decisions</a:t>
+            </a:r>
+          </a:p>
+          <a:p>
+            <a:pPr/>
+            <a:r>
+              <a:t>max_depth controls the overfitting/underfitting tradeoff</a:t>
+            </a:r>
+          </a:p>
+          <a:p>
+            <a:pPr/>
+            <a:r>
+              <a:t>Trees are interpretable, need no scaling, and handle non-linear patterns</a:t>
+            </a:r>
+          </a:p>
+          <a:p>
+            <a:pPr/>
+            <a:r>
+              <a:t>They are the building block for Random Forests in Stage 2</a:t>
+            </a:r>
+          </a:p>
+          <a:p>
+            <a:pPr/>
+            <a:r>
+              <a:t>Next: Lesson 1.5 — Model Evaluation</a:t>
+            </a:r>
+          </a:p>
+        </p:txBody>
+      </p:sp>
+      <p:sp>
+        <p:nvSpPr>
+          <p:cNvPr id="3" name="Title 2"/>
+          <p:cNvSpPr>
+            <a:spLocks noGrp="1"/>
+          </p:cNvSpPr>
+          <p:nvPr>
+            <p:ph type="title"/>
+          </p:nvPr>
+        </p:nvSpPr>
+        <p:spPr/>
+        <p:txBody>
+          <a:bodyPr/>
+          <a:lstStyle/>
+          <a:p>
+            <a:r>
+              <a:t>Summary</a:t>
+            </a:r>
+          </a:p>
+        </p:txBody>
+      </p:sp>
+    </p:spTree>
+  </p:cSld>
+  <p:clrMapOvr>
+    <a:masterClrMapping/>
+  </p:clrMapOvr>
+</p:sld>
+</file>
+
+<file path=ppt/slides/slide18.xml><?xml version="1.0" encoding="utf-8"?>
+<p:sld xmlns:a="http://schemas.openxmlformats.org/drawingml/2006/main" xmlns:p="http://schemas.openxmlformats.org/presentationml/2006/main" xmlns:r="http://schemas.openxmlformats.org/officeDocument/2006/relationships">
+  <p:cSld>
+    <p:spTree>
+      <p:nvGrpSpPr>
+        <p:cNvPr id="1" name=""/>
+        <p:cNvGrpSpPr/>
+        <p:nvPr/>
+      </p:nvGrpSpPr>
+      <p:grpSpPr/>
+      <p:sp>
+        <p:nvSpPr>
           <p:cNvPr id="2" name="Text Placeholder 1"/>
           <p:cNvSpPr>
             <a:spLocks noGrp="1"/>
@@ -9003,13 +9131,13 @@
           <a:p>
             <a:pPr/>
             <a:r>
-              <a:t>Real-life example: network traffic classifier</a:t>
+              <a:t>How splits are chosen — Gini impurity</a:t>
             </a:r>
           </a:p>
           <a:p>
             <a:pPr/>
             <a:r>
-              <a:t>How splits are chosen — Gini impurity</a:t>
+              <a:t>Real-life: network traffic classifier</a:t>
             </a:r>
           </a:p>
           <a:p>
@@ -9158,69 +9286,35 @@
           <a:lstStyle/>
           <a:p>
             <a:r>
-              <a:t>Decision Trees — A Flowchart of Yes/No Questions</a:t>
-            </a:r>
-          </a:p>
-        </p:txBody>
-      </p:sp>
-      <p:sp>
-        <p:nvSpPr>
-          <p:cNvPr id="3" name="Content Placeholder 2"/>
-          <p:cNvSpPr>
-            <a:spLocks noGrp="1"/>
-          </p:cNvSpPr>
-          <p:nvPr>
-            <p:ph idx="1"/>
-          </p:nvPr>
-        </p:nvSpPr>
-        <p:spPr/>
-        <p:txBody>
-          <a:bodyPr/>
-          <a:lstStyle/>
-          <a:p>
-            <a:pPr/>
-            <a:r>
-              <a:t>A decision tree works exactly like a flowchart:</a:t>
-            </a:r>
-          </a:p>
-          <a:p>
-            <a:pPr lvl="1"/>
-            <a:r>
-              <a:t>bytes_sent &gt; 10,000?  →  YES  →  duration &lt; 0.1s?  →  ATTACK (exfil)</a:t>
-            </a:r>
-          </a:p>
-          <a:p>
-            <a:pPr lvl="1"/>
-            <a:r>
-              <a:t>unique_dest_ports &gt; 20?  →  YES  →  ATTACK (port scan)</a:t>
-            </a:r>
-          </a:p>
-          <a:p>
-            <a:pPr/>
-            <a:r>
-              <a:t>The model learns which questions to ask and at what thresholds</a:t>
-            </a:r>
-          </a:p>
-          <a:p>
-            <a:pPr lvl="1"/>
-            <a:r>
-              <a:t>It picks the splits that best separate your classes</a:t>
-            </a:r>
-          </a:p>
-          <a:p>
-            <a:pPr/>
-            <a:r>
-              <a:t>No hand-crafted rules — the tree discovers them from data</a:t>
-            </a:r>
-          </a:p>
-          <a:p>
-            <a:pPr/>
-            <a:r>
-              <a:t>You can read the tree and see exactly why each sample was classified</a:t>
-            </a:r>
-          </a:p>
-        </p:txBody>
-      </p:sp>
+              <a:t>Decision Tree — A Flowchart of Learned Yes/No Questions</a:t>
+            </a:r>
+          </a:p>
+        </p:txBody>
+      </p:sp>
+      <p:pic>
+        <p:nvPicPr>
+          <p:cNvPr id="3" name="Picture 2" descr="dt_tree.png"/>
+          <p:cNvPicPr>
+            <a:picLocks noChangeAspect="1"/>
+          </p:cNvPicPr>
+          <p:nvPr/>
+        </p:nvPicPr>
+        <p:blipFill>
+          <a:blip r:embed="rId2"/>
+          <a:stretch>
+            <a:fillRect/>
+          </a:stretch>
+        </p:blipFill>
+        <p:spPr>
+          <a:xfrm>
+            <a:off x="1097280" y="1188720"/>
+            <a:ext cx="10058400" cy="5913539"/>
+          </a:xfrm>
+          <a:prstGeom prst="rect">
+            <a:avLst/>
+          </a:prstGeom>
+        </p:spPr>
+      </p:pic>
     </p:spTree>
   </p:cSld>
   <p:clrMapOvr>
@@ -9246,7 +9340,7 @@
             <a:spLocks noGrp="1"/>
           </p:cNvSpPr>
           <p:nvPr>
-            <p:ph type="body" idx="13" sz="quarter"/>
+            <p:ph type="body" idx="14" sz="quarter"/>
           </p:nvPr>
         </p:nvSpPr>
         <p:spPr/>
@@ -9255,12 +9349,7 @@
           <a:lstStyle/>
           <a:p>
             <a:r>
-              <a:t>Network Traffic</a:t>
-            </a:r>
-          </a:p>
-          <a:p>
-            <a:r>
-              <a:t>Classifier</a:t>
+              <a:t>— Interpretability is a feature</a:t>
             </a:r>
           </a:p>
         </p:txBody>
@@ -9268,6 +9357,58 @@
       <p:sp>
         <p:nvSpPr>
           <p:cNvPr id="3" name="Text Placeholder 2"/>
+          <p:cNvSpPr>
+            <a:spLocks noGrp="1"/>
+          </p:cNvSpPr>
+          <p:nvPr>
+            <p:ph type="body" idx="15" sz="quarter"/>
+          </p:nvPr>
+        </p:nvSpPr>
+        <p:spPr/>
+        <p:txBody>
+          <a:bodyPr/>
+          <a:lstStyle/>
+          <a:p>
+            <a:r>
+              <a:t>The only ML model where you</a:t>
+            </a:r>
+          </a:p>
+          <a:p>
+            <a:r>
+              <a:t>can print the learned rules</a:t>
+            </a:r>
+          </a:p>
+          <a:p>
+            <a:r>
+              <a:t>as a readable flowchart.</a:t>
+            </a:r>
+          </a:p>
+        </p:txBody>
+      </p:sp>
+      <p:sp>
+        <p:nvSpPr>
+          <p:cNvPr id="4" name="Title 3"/>
+          <p:cNvSpPr>
+            <a:spLocks noGrp="1"/>
+          </p:cNvSpPr>
+          <p:nvPr>
+            <p:ph type="title"/>
+          </p:nvPr>
+        </p:nvSpPr>
+        <p:spPr/>
+        <p:txBody>
+          <a:bodyPr/>
+          <a:lstStyle/>
+          <a:p>
+            <a:r>
+              <a:t>What Makes Trees Special</a:t>
+            </a:r>
+          </a:p>
+        </p:txBody>
+      </p:sp>
+      <p:sp>
+        <p:nvSpPr>
+          <p:cNvPr id="5" name="Text Placeholder 4"/>
           <p:cNvSpPr>
             <a:spLocks noGrp="1"/>
           </p:cNvSpPr>
@@ -9280,8 +9421,39 @@
           <a:bodyPr/>
           <a:lstStyle/>
           <a:p>
-            <a:r>
-              <a:t>02</a:t>
+            <a:pPr/>
+            <a:r>
+              <a:t>The model learns which questions to ask</a:t>
+            </a:r>
+          </a:p>
+          <a:p>
+            <a:pPr/>
+            <a:r>
+              <a:t>And at what thresholds to split</a:t>
+            </a:r>
+          </a:p>
+          <a:p>
+            <a:pPr/>
+            <a:r>
+              <a:t>No hand-crafted rules needed</a:t>
+            </a:r>
+          </a:p>
+          <a:p>
+            <a:pPr/>
+            <a:r>
+              <a:t>The tree discovers them from data</a:t>
+            </a:r>
+          </a:p>
+          <a:p>
+            <a:pPr/>
+            <a:r>
+              <a:t>You can read the result and see exactly</a:t>
+            </a:r>
+          </a:p>
+          <a:p>
+            <a:pPr lvl="1"/>
+            <a:r>
+              <a:t>why each sample was classified</a:t>
             </a:r>
           </a:p>
         </p:txBody>
@@ -9306,12 +9478,12 @@
       <p:grpSpPr/>
       <p:sp>
         <p:nvSpPr>
-          <p:cNvPr id="2" name="Title 1"/>
+          <p:cNvPr id="2" name="Text Placeholder 1"/>
           <p:cNvSpPr>
             <a:spLocks noGrp="1"/>
           </p:cNvSpPr>
           <p:nvPr>
-            <p:ph type="title"/>
+            <p:ph type="body" idx="13" sz="quarter"/>
           </p:nvPr>
         </p:nvSpPr>
         <p:spPr/>
@@ -9320,19 +9492,24 @@
           <a:lstStyle/>
           <a:p>
             <a:r>
-              <a:t>Real-Life Example: Network Traffic Classifier</a:t>
-            </a:r>
-          </a:p>
-        </p:txBody>
-      </p:sp>
-      <p:sp>
-        <p:nvSpPr>
-          <p:cNvPr id="3" name="Content Placeholder 2"/>
+              <a:t>How Splits</a:t>
+            </a:r>
+          </a:p>
+          <a:p>
+            <a:r>
+              <a:t>Are Chosen</a:t>
+            </a:r>
+          </a:p>
+        </p:txBody>
+      </p:sp>
+      <p:sp>
+        <p:nvSpPr>
+          <p:cNvPr id="3" name="Text Placeholder 2"/>
           <p:cNvSpPr>
             <a:spLocks noGrp="1"/>
           </p:cNvSpPr>
           <p:nvPr>
-            <p:ph idx="1"/>
+            <p:ph type="body" idx="16" sz="quarter"/>
           </p:nvPr>
         </p:nvSpPr>
         <p:spPr/>
@@ -9340,57 +9517,8 @@
           <a:bodyPr/>
           <a:lstStyle/>
           <a:p>
-            <a:pPr/>
-            <a:r>
-              <a:t>Features from a network connection log:</a:t>
-            </a:r>
-          </a:p>
-          <a:p>
-            <a:pPr lvl="1"/>
-            <a:r>
-              <a:t>duration — how long the connection lasted (seconds)</a:t>
-            </a:r>
-          </a:p>
-          <a:p>
-            <a:pPr lvl="1"/>
-            <a:r>
-              <a:t>bytes_sent — total bytes transferred</a:t>
-            </a:r>
-          </a:p>
-          <a:p>
-            <a:pPr lvl="1"/>
-            <a:r>
-              <a:t>packets_sent — number of packets</a:t>
-            </a:r>
-          </a:p>
-          <a:p>
-            <a:pPr lvl="1"/>
-            <a:r>
-              <a:t>unique_dest_ports — how many different ports were contacted</a:t>
-            </a:r>
-          </a:p>
-          <a:p>
-            <a:pPr lvl="1"/>
-            <a:r>
-              <a:t>connection_rate — connections per minute from this IP</a:t>
-            </a:r>
-          </a:p>
-          <a:p>
-            <a:pPr/>
-            <a:r>
-              <a:t>Attack signatures:</a:t>
-            </a:r>
-          </a:p>
-          <a:p>
-            <a:pPr lvl="1"/>
-            <a:r>
-              <a:t>Port scan: many connections, short duration, many unique ports</a:t>
-            </a:r>
-          </a:p>
-          <a:p>
-            <a:pPr lvl="1"/>
-            <a:r>
-              <a:t>Data exfil: long connection, large bytes_sent, few unique ports</a:t>
+            <a:r>
+              <a:t>02</a:t>
             </a:r>
           </a:p>
         </p:txBody>
@@ -9415,12 +9543,12 @@
       <p:grpSpPr/>
       <p:sp>
         <p:nvSpPr>
-          <p:cNvPr id="2" name="Text Placeholder 1"/>
+          <p:cNvPr id="2" name="Title 1"/>
           <p:cNvSpPr>
             <a:spLocks noGrp="1"/>
           </p:cNvSpPr>
           <p:nvPr>
-            <p:ph type="body" idx="13" sz="quarter"/>
+            <p:ph type="title"/>
           </p:nvPr>
         </p:nvSpPr>
         <p:spPr/>
@@ -9429,37 +9557,35 @@
           <a:lstStyle/>
           <a:p>
             <a:r>
-              <a:t>How Splits</a:t>
-            </a:r>
-          </a:p>
-          <a:p>
-            <a:r>
-              <a:t>Are Chosen</a:t>
-            </a:r>
-          </a:p>
-        </p:txBody>
-      </p:sp>
-      <p:sp>
-        <p:nvSpPr>
-          <p:cNvPr id="3" name="Text Placeholder 2"/>
-          <p:cNvSpPr>
-            <a:spLocks noGrp="1"/>
-          </p:cNvSpPr>
-          <p:nvPr>
-            <p:ph type="body" idx="16" sz="quarter"/>
-          </p:nvPr>
-        </p:nvSpPr>
-        <p:spPr/>
-        <p:txBody>
-          <a:bodyPr/>
-          <a:lstStyle/>
-          <a:p>
-            <a:r>
-              <a:t>03</a:t>
-            </a:r>
-          </a:p>
-        </p:txBody>
-      </p:sp>
+              <a:t>Gini Impurity — Measuring Split Quality</a:t>
+            </a:r>
+          </a:p>
+        </p:txBody>
+      </p:sp>
+      <p:pic>
+        <p:nvPicPr>
+          <p:cNvPr id="3" name="Picture 2" descr="dt_gini.png"/>
+          <p:cNvPicPr>
+            <a:picLocks noChangeAspect="1"/>
+          </p:cNvPicPr>
+          <p:nvPr/>
+        </p:nvPicPr>
+        <p:blipFill>
+          <a:blip r:embed="rId2"/>
+          <a:stretch>
+            <a:fillRect/>
+          </a:stretch>
+        </p:blipFill>
+        <p:spPr>
+          <a:xfrm>
+            <a:off x="1097280" y="1371600"/>
+            <a:ext cx="10058400" cy="3859703"/>
+          </a:xfrm>
+          <a:prstGeom prst="rect">
+            <a:avLst/>
+          </a:prstGeom>
+        </p:spPr>
+      </p:pic>
     </p:spTree>
   </p:cSld>
   <p:clrMapOvr>
@@ -9494,7 +9620,7 @@
           <a:lstStyle/>
           <a:p>
             <a:r>
-              <a:t>How the Tree Chooses Splits</a:t>
+              <a:t>The Splitting Process</a:t>
             </a:r>
           </a:p>
         </p:txBody>
@@ -9522,43 +9648,37 @@
           <a:p>
             <a:pPr/>
             <a:r>
-              <a:t>It picks the split that best separates the classes</a:t>
+              <a:t>It picks the split that reduces impurity the most</a:t>
             </a:r>
           </a:p>
           <a:p>
             <a:pPr/>
             <a:r>
-              <a:t>Measured by Gini impurity (or entropy):</a:t>
-            </a:r>
-          </a:p>
-          <a:p>
-            <a:pPr lvl="1"/>
-            <a:r>
               <a:t>Gini = 0.0 → perfectly pure node (all one class)</a:t>
             </a:r>
           </a:p>
           <a:p>
-            <a:pPr lvl="1"/>
-            <a:r>
-              <a:t>Gini = 0.5 → worst case (50/50 mix)</a:t>
-            </a:r>
-          </a:p>
-          <a:p>
             <a:pPr/>
             <a:r>
-              <a:t>The tree greedily picks the split that reduces impurity the most</a:t>
-            </a:r>
-          </a:p>
-          <a:p>
-            <a:pPr lvl="1"/>
-            <a:r>
-              <a:t>This is called information gain</a:t>
+              <a:t>Gini = 0.5 → worst case (50/50 mix, no information)</a:t>
             </a:r>
           </a:p>
           <a:p>
             <a:pPr/>
             <a:r>
+              <a:t>The tree greedily picks the best split — this is called information gain</a:t>
+            </a:r>
+          </a:p>
+          <a:p>
+            <a:pPr/>
+            <a:r>
               <a:t>Result: an automatically learned set of if/else rules</a:t>
+            </a:r>
+          </a:p>
+          <a:p>
+            <a:pPr/>
+            <a:r>
+              <a:t>No maths needed from you — sklearn handles it all</a:t>
             </a:r>
           </a:p>
         </p:txBody>
@@ -9583,12 +9703,12 @@
       <p:grpSpPr/>
       <p:sp>
         <p:nvSpPr>
-          <p:cNvPr id="2" name="Title 1"/>
+          <p:cNvPr id="2" name="Text Placeholder 1"/>
           <p:cNvSpPr>
             <a:spLocks noGrp="1"/>
           </p:cNvSpPr>
           <p:nvPr>
-            <p:ph type="title"/>
+            <p:ph type="body" idx="13" sz="quarter"/>
           </p:nvPr>
         </p:nvSpPr>
         <p:spPr/>
@@ -9597,19 +9717,24 @@
           <a:lstStyle/>
           <a:p>
             <a:r>
-              <a:t>Feature Importance</a:t>
-            </a:r>
-          </a:p>
-        </p:txBody>
-      </p:sp>
-      <p:sp>
-        <p:nvSpPr>
-          <p:cNvPr id="3" name="Content Placeholder 2"/>
+              <a:t>Network Traffic</a:t>
+            </a:r>
+          </a:p>
+          <a:p>
+            <a:r>
+              <a:t>Classifier</a:t>
+            </a:r>
+          </a:p>
+        </p:txBody>
+      </p:sp>
+      <p:sp>
+        <p:nvSpPr>
+          <p:cNvPr id="3" name="Text Placeholder 2"/>
           <p:cNvSpPr>
             <a:spLocks noGrp="1"/>
           </p:cNvSpPr>
           <p:nvPr>
-            <p:ph idx="1"/>
+            <p:ph type="body" idx="16" sz="quarter"/>
           </p:nvPr>
         </p:nvSpPr>
         <p:spPr/>
@@ -9617,57 +9742,8 @@
           <a:bodyPr/>
           <a:lstStyle/>
           <a:p>
-            <a:pPr/>
-            <a:r>
-              <a:t>model.feature_importances_ tells you which features the tree relies on</a:t>
-            </a:r>
-          </a:p>
-          <a:p>
-            <a:pPr/>
-            <a:r>
-              <a:t>Higher importance = feature was used in more splits with higher impact</a:t>
-            </a:r>
-          </a:p>
-          <a:p>
-            <a:pPr/>
-            <a:r>
-              <a:t>Example output:</a:t>
-            </a:r>
-          </a:p>
-          <a:p>
-            <a:pPr lvl="1"/>
-            <a:r>
-              <a:t>bytes_sent:         0.42</a:t>
-            </a:r>
-          </a:p>
-          <a:p>
-            <a:pPr lvl="1"/>
-            <a:r>
-              <a:t>unique_dest_ports:  0.31</a:t>
-            </a:r>
-          </a:p>
-          <a:p>
-            <a:pPr lvl="1"/>
-            <a:r>
-              <a:t>duration:           0.18</a:t>
-            </a:r>
-          </a:p>
-          <a:p>
-            <a:pPr lvl="1"/>
-            <a:r>
-              <a:t>connection_rate:    0.09</a:t>
-            </a:r>
-          </a:p>
-          <a:p>
-            <a:pPr/>
-            <a:r>
-              <a:t>Great for understanding why your model works</a:t>
-            </a:r>
-          </a:p>
-          <a:p>
-            <a:pPr/>
-            <a:r>
-              <a:t>And for identifying which log fields to prioritise in collection</a:t>
+            <a:r>
+              <a:t>03</a:t>
             </a:r>
           </a:p>
         </p:txBody>

--- a/stage1_classic_ml/04_decision_trees/Lecture-4-Decision-Trees.pptx
+++ b/stage1_classic_ml/04_decision_trees/Lecture-4-Decision-Trees.pptx
@@ -29,6 +29,8 @@
     <p:sldId id="271" r:id="rId27"/>
     <p:sldId id="272" r:id="rId28"/>
     <p:sldId id="273" r:id="rId29"/>
+    <p:sldId id="274" r:id="rId30"/>
+    <p:sldId id="275" r:id="rId31"/>
   </p:sldIdLst>
   <p:sldSz cx="12188825" cy="6858000"/>
   <p:notesSz cx="7010400" cy="9296400"/>
@@ -8332,7 +8334,7 @@
           <a:lstStyle/>
           <a:p>
             <a:r>
-              <a:t>Lesson 1.4 — Stage 1: Classic Machine Learning</a:t>
+              <a:t>Lesson 1.4  |  Stage 1: Classic Machine Learning</a:t>
             </a:r>
           </a:p>
         </p:txBody>
@@ -8374,7 +8376,7 @@
           <a:lstStyle/>
           <a:p>
             <a:r>
-              <a:t>For Security Professionals</a:t>
+              <a:t>Learning Rules from Data  -  Network Traffic Classification</a:t>
             </a:r>
           </a:p>
         </p:txBody>
@@ -8413,14 +8415,14 @@
           <a:lstStyle/>
           <a:p>
             <a:r>
-              <a:t>Attack Signatures in Network Features</a:t>
+              <a:t>Three Attack Types - Distinct Feature Signatures</a:t>
             </a:r>
           </a:p>
         </p:txBody>
       </p:sp>
       <p:pic>
         <p:nvPicPr>
-          <p:cNvPr id="3" name="Picture 2" descr="dt_attacks.png"/>
+          <p:cNvPr id="3" name="Picture 2" descr="attack_sigs.png"/>
           <p:cNvPicPr>
             <a:picLocks noChangeAspect="1"/>
           </p:cNvPicPr>
@@ -8435,7 +8437,7 @@
         <p:spPr>
           <a:xfrm>
             <a:off x="274320" y="1371600"/>
-            <a:ext cx="11430000" cy="4159541"/>
+            <a:ext cx="11612880" cy="4235286"/>
           </a:xfrm>
           <a:prstGeom prst="rect">
             <a:avLst/>
@@ -8476,14 +8478,14 @@
           <a:lstStyle/>
           <a:p>
             <a:r>
-              <a:t>Feature Importance — Which Network Features Matter Most?</a:t>
+              <a:t>Feature Importance - Which Network Features Matter Most?</a:t>
             </a:r>
           </a:p>
         </p:txBody>
       </p:sp>
       <p:pic>
         <p:nvPicPr>
-          <p:cNvPr id="3" name="Picture 2" descr="dt_importance.png"/>
+          <p:cNvPr id="3" name="Picture 2" descr="feat_importance.png"/>
           <p:cNvPicPr>
             <a:picLocks noChangeAspect="1"/>
           </p:cNvPicPr>
@@ -8497,8 +8499,8 @@
         </p:blipFill>
         <p:spPr>
           <a:xfrm>
-            <a:off x="2011680" y="1371600"/>
-            <a:ext cx="8229600" cy="4507893"/>
+            <a:off x="640080" y="1371600"/>
+            <a:ext cx="10972800" cy="4400403"/>
           </a:xfrm>
           <a:prstGeom prst="rect">
             <a:avLst/>
@@ -8525,12 +8527,12 @@
       <p:grpSpPr/>
       <p:sp>
         <p:nvSpPr>
-          <p:cNvPr id="2" name="Text Placeholder 1"/>
+          <p:cNvPr id="2" name="Title 1"/>
           <p:cNvSpPr>
             <a:spLocks noGrp="1"/>
           </p:cNvSpPr>
           <p:nvPr>
-            <p:ph type="body" idx="13" sz="quarter"/>
+            <p:ph type="title"/>
           </p:nvPr>
         </p:nvSpPr>
         <p:spPr/>
@@ -8539,24 +8541,19 @@
           <a:lstStyle/>
           <a:p>
             <a:r>
-              <a:t>Overfitting &amp;</a:t>
-            </a:r>
-          </a:p>
-          <a:p>
-            <a:r>
-              <a:t>Tree Depth</a:t>
-            </a:r>
-          </a:p>
-        </p:txBody>
-      </p:sp>
-      <p:sp>
-        <p:nvSpPr>
-          <p:cNvPr id="3" name="Text Placeholder 2"/>
+              <a:t>The Code - Training and Visualising the Tree</a:t>
+            </a:r>
+          </a:p>
+        </p:txBody>
+      </p:sp>
+      <p:sp>
+        <p:nvSpPr>
+          <p:cNvPr id="3" name="Content Placeholder 2"/>
           <p:cNvSpPr>
             <a:spLocks noGrp="1"/>
           </p:cNvSpPr>
           <p:nvPr>
-            <p:ph type="body" idx="16" sz="quarter"/>
+            <p:ph idx="1"/>
           </p:nvPr>
         </p:nvSpPr>
         <p:spPr/>
@@ -8565,7 +8562,74 @@
           <a:lstStyle/>
           <a:p>
             <a:r>
-              <a:t>04</a:t>
+              <a:rPr sz="1500"/>
+              <a:t>from sklearn.tree import DecisionTreeClassifier, plot_tree</a:t>
+            </a:r>
+          </a:p>
+          <a:p>
+            <a:r>
+              <a:rPr sz="1500"/>
+              <a:t/>
+            </a:r>
+          </a:p>
+          <a:p>
+            <a:r>
+              <a:rPr sz="1500"/>
+              <a:t>model = DecisionTreeClassifier(max_depth=4, random_state=42)</a:t>
+            </a:r>
+          </a:p>
+          <a:p>
+            <a:r>
+              <a:rPr sz="1500"/>
+              <a:t>model.fit(X_train, y_train)</a:t>
+            </a:r>
+          </a:p>
+          <a:p>
+            <a:r>
+              <a:rPr sz="1500"/>
+              <a:t/>
+            </a:r>
+          </a:p>
+          <a:p>
+            <a:r>
+              <a:rPr sz="1500"/>
+              <a:t># See the actual rules the model learned:</a:t>
+            </a:r>
+          </a:p>
+          <a:p>
+            <a:r>
+              <a:rPr sz="1500"/>
+              <a:t>plot_tree(model, feature_names=feature_names,</a:t>
+            </a:r>
+          </a:p>
+          <a:p>
+            <a:r>
+              <a:rPr sz="1500"/>
+              <a:t>          class_names=['Benign','PortScan','Exfil','DoS'],</a:t>
+            </a:r>
+          </a:p>
+          <a:p>
+            <a:r>
+              <a:rPr sz="1500"/>
+              <a:t>          filled=True, fontsize=8)</a:t>
+            </a:r>
+          </a:p>
+          <a:p>
+            <a:r>
+              <a:rPr sz="1500"/>
+              <a:t/>
+            </a:r>
+          </a:p>
+          <a:p>
+            <a:r>
+              <a:rPr sz="1500"/>
+              <a:t># Which features matter most?</a:t>
+            </a:r>
+          </a:p>
+          <a:p>
+            <a:r>
+              <a:rPr sz="1500"/>
+              <a:t>print(model.feature_importances_)</a:t>
             </a:r>
           </a:p>
         </p:txBody>
@@ -8590,12 +8654,12 @@
       <p:grpSpPr/>
       <p:sp>
         <p:nvSpPr>
-          <p:cNvPr id="2" name="Title 1"/>
+          <p:cNvPr id="2" name="Text Placeholder 1"/>
           <p:cNvSpPr>
             <a:spLocks noGrp="1"/>
           </p:cNvSpPr>
           <p:nvPr>
-            <p:ph type="title"/>
+            <p:ph type="body" idx="13" sz="quarter"/>
           </p:nvPr>
         </p:nvSpPr>
         <p:spPr/>
@@ -8604,35 +8668,37 @@
           <a:lstStyle/>
           <a:p>
             <a:r>
-              <a:t>Overfitting — Train vs Test Accuracy at Different Depths</a:t>
-            </a:r>
-          </a:p>
-        </p:txBody>
-      </p:sp>
-      <p:pic>
-        <p:nvPicPr>
-          <p:cNvPr id="3" name="Picture 2" descr="dt_overfitting.png"/>
-          <p:cNvPicPr>
-            <a:picLocks noChangeAspect="1"/>
-          </p:cNvPicPr>
-          <p:nvPr/>
-        </p:nvPicPr>
-        <p:blipFill>
-          <a:blip r:embed="rId2"/>
-          <a:stretch>
-            <a:fillRect/>
-          </a:stretch>
-        </p:blipFill>
-        <p:spPr>
-          <a:xfrm>
-            <a:off x="2011680" y="1371600"/>
-            <a:ext cx="8229600" cy="4992530"/>
-          </a:xfrm>
-          <a:prstGeom prst="rect">
-            <a:avLst/>
-          </a:prstGeom>
-        </p:spPr>
-      </p:pic>
+              <a:t>Overfitting and</a:t>
+            </a:r>
+          </a:p>
+          <a:p>
+            <a:r>
+              <a:t>How to Control It</a:t>
+            </a:r>
+          </a:p>
+        </p:txBody>
+      </p:sp>
+      <p:sp>
+        <p:nvSpPr>
+          <p:cNvPr id="3" name="Text Placeholder 2"/>
+          <p:cNvSpPr>
+            <a:spLocks noGrp="1"/>
+          </p:cNvSpPr>
+          <p:nvPr>
+            <p:ph type="body" idx="16" sz="quarter"/>
+          </p:nvPr>
+        </p:nvSpPr>
+        <p:spPr/>
+        <p:txBody>
+          <a:bodyPr/>
+          <a:lstStyle/>
+          <a:p>
+            <a:r>
+              <a:t>04</a:t>
+            </a:r>
+          </a:p>
+        </p:txBody>
+      </p:sp>
     </p:spTree>
   </p:cSld>
   <p:clrMapOvr>
@@ -8667,124 +8733,35 @@
           <a:lstStyle/>
           <a:p>
             <a:r>
-              <a:t>Controlling Overfitting</a:t>
-            </a:r>
-          </a:p>
-        </p:txBody>
-      </p:sp>
-      <p:sp>
-        <p:nvSpPr>
-          <p:cNvPr id="3" name="Content Placeholder 2"/>
-          <p:cNvSpPr>
-            <a:spLocks noGrp="1"/>
-          </p:cNvSpPr>
-          <p:nvPr>
-            <p:ph idx="2" sz="half"/>
-          </p:nvPr>
-        </p:nvSpPr>
-        <p:spPr/>
-        <p:txBody>
-          <a:bodyPr/>
-          <a:lstStyle/>
-          <a:p>
-            <a:pPr/>
-            <a:r>
-              <a:t>Too Deep (overfitting)</a:t>
-            </a:r>
-          </a:p>
-          <a:p>
-            <a:pPr/>
-          </a:p>
-          <a:p>
-            <a:pPr/>
-            <a:r>
-              <a:t>Memorises training data perfectly</a:t>
-            </a:r>
-          </a:p>
-          <a:p>
-            <a:pPr/>
-            <a:r>
-              <a:t>Creates a rule for every edge case</a:t>
-            </a:r>
-          </a:p>
-          <a:p>
-            <a:pPr/>
-            <a:r>
-              <a:t>Perfect training accuracy</a:t>
-            </a:r>
-          </a:p>
-          <a:p>
-            <a:pPr/>
-            <a:r>
-              <a:t>Poor test accuracy</a:t>
-            </a:r>
-          </a:p>
-          <a:p>
-            <a:pPr/>
-            <a:r>
-              <a:t>The gap widens with depth</a:t>
-            </a:r>
-          </a:p>
-        </p:txBody>
-      </p:sp>
-      <p:sp>
-        <p:nvSpPr>
-          <p:cNvPr id="4" name="Content Placeholder 3"/>
-          <p:cNvSpPr>
-            <a:spLocks noGrp="1"/>
-          </p:cNvSpPr>
-          <p:nvPr>
-            <p:ph idx="12" sz="half"/>
-          </p:nvPr>
-        </p:nvSpPr>
-        <p:spPr/>
-        <p:txBody>
-          <a:bodyPr/>
-          <a:lstStyle/>
-          <a:p>
-            <a:pPr/>
-            <a:r>
-              <a:t>Controls</a:t>
-            </a:r>
-          </a:p>
-          <a:p>
-            <a:pPr/>
-          </a:p>
-          <a:p>
-            <a:pPr/>
-            <a:r>
-              <a:t>max_depth — limits tree growth</a:t>
-            </a:r>
-          </a:p>
-          <a:p>
-            <a:pPr/>
-            <a:r>
-              <a:t>min_samples_split — minimum samples to split</a:t>
-            </a:r>
-          </a:p>
-          <a:p>
-            <a:pPr/>
-          </a:p>
-          <a:p>
-            <a:pPr/>
-            <a:r>
-              <a:t>Finding the sweet spot is the key task</a:t>
-            </a:r>
-          </a:p>
-          <a:p>
-            <a:pPr/>
-            <a:r>
-              <a:t>Too shallow = underfitting</a:t>
-            </a:r>
-          </a:p>
-          <a:p>
-            <a:pPr/>
-            <a:r>
-              <a:t>Too deep = overfitting</a:t>
-            </a:r>
-          </a:p>
-        </p:txBody>
-      </p:sp>
+              <a:t>Train vs Test Accuracy at Different Depths</a:t>
+            </a:r>
+          </a:p>
+        </p:txBody>
+      </p:sp>
+      <p:pic>
+        <p:nvPicPr>
+          <p:cNvPr id="3" name="Picture 2" descr="overfitting.png"/>
+          <p:cNvPicPr>
+            <a:picLocks noChangeAspect="1"/>
+          </p:cNvPicPr>
+          <p:nvPr/>
+        </p:nvPicPr>
+        <p:blipFill>
+          <a:blip r:embed="rId2"/>
+          <a:stretch>
+            <a:fillRect/>
+          </a:stretch>
+        </p:blipFill>
+        <p:spPr>
+          <a:xfrm>
+            <a:off x="640080" y="1188720"/>
+            <a:ext cx="10972800" cy="4903100"/>
+          </a:xfrm>
+          <a:prstGeom prst="rect">
+            <a:avLst/>
+          </a:prstGeom>
+        </p:spPr>
+      </p:pic>
     </p:spTree>
   </p:cSld>
   <p:clrMapOvr>
@@ -8805,12 +8782,12 @@
       <p:grpSpPr/>
       <p:sp>
         <p:nvSpPr>
-          <p:cNvPr id="2" name="Text Placeholder 1"/>
+          <p:cNvPr id="2" name="Title 1"/>
           <p:cNvSpPr>
             <a:spLocks noGrp="1"/>
           </p:cNvSpPr>
           <p:nvPr>
-            <p:ph type="body" idx="13" sz="quarter"/>
+            <p:ph type="title"/>
           </p:nvPr>
         </p:nvSpPr>
         <p:spPr/>
@@ -8819,19 +8796,19 @@
           <a:lstStyle/>
           <a:p>
             <a:r>
-              <a:t>Workshop</a:t>
-            </a:r>
-          </a:p>
-        </p:txBody>
-      </p:sp>
-      <p:sp>
-        <p:nvSpPr>
-          <p:cNvPr id="3" name="Text Placeholder 2"/>
+              <a:t>Two Controls to Prevent Overfitting</a:t>
+            </a:r>
+          </a:p>
+        </p:txBody>
+      </p:sp>
+      <p:sp>
+        <p:nvSpPr>
+          <p:cNvPr id="3" name="Content Placeholder 2"/>
           <p:cNvSpPr>
             <a:spLocks noGrp="1"/>
           </p:cNvSpPr>
           <p:nvPr>
-            <p:ph type="body" idx="16" sz="quarter"/>
+            <p:ph idx="2" sz="half"/>
           </p:nvPr>
         </p:nvSpPr>
         <p:spPr/>
@@ -8840,7 +8817,150 @@
           <a:lstStyle/>
           <a:p>
             <a:r>
-              <a:t>05</a:t>
+              <a:rPr sz="1400"/>
+              <a:t>max_depth</a:t>
+            </a:r>
+          </a:p>
+          <a:p>
+            <a:r>
+              <a:rPr sz="1400"/>
+              <a:t/>
+            </a:r>
+          </a:p>
+          <a:p>
+            <a:r>
+              <a:rPr sz="1400"/>
+              <a:t>Limits how deep the tree grows</a:t>
+            </a:r>
+          </a:p>
+          <a:p>
+            <a:r>
+              <a:rPr sz="1400"/>
+              <a:t/>
+            </a:r>
+          </a:p>
+          <a:p>
+            <a:r>
+              <a:rPr sz="1400"/>
+              <a:t>Low depth (2-3):</a:t>
+            </a:r>
+          </a:p>
+          <a:p>
+            <a:r>
+              <a:rPr sz="1400"/>
+              <a:t>  Simple, may underfit</a:t>
+            </a:r>
+          </a:p>
+          <a:p>
+            <a:r>
+              <a:rPr sz="1400"/>
+              <a:t/>
+            </a:r>
+          </a:p>
+          <a:p>
+            <a:r>
+              <a:rPr sz="1400"/>
+              <a:t>High depth (15+):</a:t>
+            </a:r>
+          </a:p>
+          <a:p>
+            <a:r>
+              <a:rPr sz="1400"/>
+              <a:t>  Complex, will overfit</a:t>
+            </a:r>
+          </a:p>
+          <a:p>
+            <a:r>
+              <a:rPr sz="1400"/>
+              <a:t/>
+            </a:r>
+          </a:p>
+          <a:p>
+            <a:r>
+              <a:rPr sz="1400"/>
+              <a:t>Sweet spot: usually 4-8</a:t>
+            </a:r>
+          </a:p>
+        </p:txBody>
+      </p:sp>
+      <p:sp>
+        <p:nvSpPr>
+          <p:cNvPr id="4" name="Content Placeholder 3"/>
+          <p:cNvSpPr>
+            <a:spLocks noGrp="1"/>
+          </p:cNvSpPr>
+          <p:nvPr>
+            <p:ph idx="12" sz="half"/>
+          </p:nvPr>
+        </p:nvSpPr>
+        <p:spPr/>
+        <p:txBody>
+          <a:bodyPr/>
+          <a:lstStyle/>
+          <a:p>
+            <a:r>
+              <a:rPr sz="1400"/>
+              <a:t>min_samples_split</a:t>
+            </a:r>
+          </a:p>
+          <a:p>
+            <a:r>
+              <a:rPr sz="1400"/>
+              <a:t/>
+            </a:r>
+          </a:p>
+          <a:p>
+            <a:r>
+              <a:rPr sz="1400"/>
+              <a:t>Minimum samples to split a node</a:t>
+            </a:r>
+          </a:p>
+          <a:p>
+            <a:r>
+              <a:rPr sz="1400"/>
+              <a:t/>
+            </a:r>
+          </a:p>
+          <a:p>
+            <a:r>
+              <a:rPr sz="1400"/>
+              <a:t>High value (50+):</a:t>
+            </a:r>
+          </a:p>
+          <a:p>
+            <a:r>
+              <a:rPr sz="1400"/>
+              <a:t>  Prevents tiny leaf nodes</a:t>
+            </a:r>
+          </a:p>
+          <a:p>
+            <a:r>
+              <a:rPr sz="1400"/>
+              <a:t>  More generalisation</a:t>
+            </a:r>
+          </a:p>
+          <a:p>
+            <a:r>
+              <a:rPr sz="1400"/>
+              <a:t/>
+            </a:r>
+          </a:p>
+          <a:p>
+            <a:r>
+              <a:rPr sz="1400"/>
+              <a:t>Default is 2 (very permissive)</a:t>
+            </a:r>
+          </a:p>
+          <a:p>
+            <a:r>
+              <a:rPr sz="1400"/>
+              <a:t/>
+            </a:r>
+          </a:p>
+          <a:p>
+            <a:r>
+              <a:rPr sz="1400"/>
+              <a:t>Try 10-50 for security data</a:t>
             </a:r>
           </a:p>
         </p:txBody>
@@ -8865,12 +8985,12 @@
       <p:grpSpPr/>
       <p:sp>
         <p:nvSpPr>
-          <p:cNvPr id="2" name="Title 1"/>
+          <p:cNvPr id="2" name="Text Placeholder 1"/>
           <p:cNvSpPr>
             <a:spLocks noGrp="1"/>
           </p:cNvSpPr>
           <p:nvPr>
-            <p:ph type="title"/>
+            <p:ph type="body" idx="13" sz="quarter"/>
           </p:nvPr>
         </p:nvSpPr>
         <p:spPr/>
@@ -8879,19 +8999,24 @@
           <a:lstStyle/>
           <a:p>
             <a:r>
-              <a:t>Workshop — 4 Exercises</a:t>
-            </a:r>
-          </a:p>
-        </p:txBody>
-      </p:sp>
-      <p:sp>
-        <p:nvSpPr>
-          <p:cNvPr id="3" name="Content Placeholder 2"/>
+              <a:t>Comparison</a:t>
+            </a:r>
+          </a:p>
+          <a:p>
+            <a:r>
+              <a:t>and Next Steps</a:t>
+            </a:r>
+          </a:p>
+        </p:txBody>
+      </p:sp>
+      <p:sp>
+        <p:nvSpPr>
+          <p:cNvPr id="3" name="Text Placeholder 2"/>
           <p:cNvSpPr>
             <a:spLocks noGrp="1"/>
           </p:cNvSpPr>
           <p:nvPr>
-            <p:ph idx="1"/>
+            <p:ph type="body" idx="16" sz="quarter"/>
           </p:nvPr>
         </p:nvSpPr>
         <p:spPr/>
@@ -8899,36 +9024,8 @@
           <a:bodyPr/>
           <a:lstStyle/>
           <a:p>
-            <a:pPr/>
-            <a:r>
-              <a:t>Exercise 1: How trees make decisions — Gini impurity, information gain</a:t>
-            </a:r>
-          </a:p>
-          <a:p>
-            <a:pPr/>
-            <a:r>
-              <a:t>Exercise 2: Train and read the tree — plot_tree(), interpret learned rules</a:t>
-            </a:r>
-          </a:p>
-          <a:p>
-            <a:pPr/>
-            <a:r>
-              <a:t>Exercise 3: Feature importance — which network features matter most</a:t>
-            </a:r>
-          </a:p>
-          <a:p>
-            <a:pPr/>
-            <a:r>
-              <a:t>Exercise 4: Depth and overfitting — max_depth sweep, train vs test accuracy</a:t>
-            </a:r>
-          </a:p>
-          <a:p>
-            <a:pPr/>
-          </a:p>
-          <a:p>
-            <a:pPr/>
-            <a:r>
-              <a:t>Each exercise: lecture.md → handson.md → solution_decision_trees.py</a:t>
+            <a:r>
+              <a:t>05</a:t>
             </a:r>
           </a:p>
         </p:txBody>
@@ -8953,65 +9050,7 @@
       <p:grpSpPr/>
       <p:sp>
         <p:nvSpPr>
-          <p:cNvPr id="2" name="Text Placeholder 1"/>
-          <p:cNvSpPr>
-            <a:spLocks noGrp="1"/>
-          </p:cNvSpPr>
-          <p:nvPr>
-            <p:ph type="body" idx="12" sz="quarter"/>
-          </p:nvPr>
-        </p:nvSpPr>
-        <p:spPr/>
-        <p:txBody>
-          <a:bodyPr/>
-          <a:lstStyle/>
-          <a:p>
-            <a:pPr/>
-            <a:r>
-              <a:t>Decision trees learn if/else rules from data — no hand-crafting needed</a:t>
-            </a:r>
-          </a:p>
-          <a:p>
-            <a:pPr/>
-            <a:r>
-              <a:t>Splits are chosen by Gini impurity to maximise class separation</a:t>
-            </a:r>
-          </a:p>
-          <a:p>
-            <a:pPr/>
-            <a:r>
-              <a:t>feature_importances_ reveals which inputs drive the model's decisions</a:t>
-            </a:r>
-          </a:p>
-          <a:p>
-            <a:pPr/>
-            <a:r>
-              <a:t>max_depth controls the overfitting/underfitting tradeoff</a:t>
-            </a:r>
-          </a:p>
-          <a:p>
-            <a:pPr/>
-            <a:r>
-              <a:t>Trees are interpretable, need no scaling, and handle non-linear patterns</a:t>
-            </a:r>
-          </a:p>
-          <a:p>
-            <a:pPr/>
-            <a:r>
-              <a:t>They are the building block for Random Forests in Stage 2</a:t>
-            </a:r>
-          </a:p>
-          <a:p>
-            <a:pPr/>
-            <a:r>
-              <a:t>Next: Lesson 1.5 — Model Evaluation</a:t>
-            </a:r>
-          </a:p>
-        </p:txBody>
-      </p:sp>
-      <p:sp>
-        <p:nvSpPr>
-          <p:cNvPr id="3" name="Title 2"/>
+          <p:cNvPr id="2" name="Title 1"/>
           <p:cNvSpPr>
             <a:spLocks noGrp="1"/>
           </p:cNvSpPr>
@@ -9025,11 +9064,35 @@
           <a:lstStyle/>
           <a:p>
             <a:r>
-              <a:t>Summary</a:t>
-            </a:r>
-          </a:p>
-        </p:txBody>
-      </p:sp>
+              <a:t>How Decision Trees Compare to Previous Models</a:t>
+            </a:r>
+          </a:p>
+        </p:txBody>
+      </p:sp>
+      <p:pic>
+        <p:nvPicPr>
+          <p:cNvPr id="3" name="Picture 2" descr="tree_vs_others.png"/>
+          <p:cNvPicPr>
+            <a:picLocks noChangeAspect="1"/>
+          </p:cNvPicPr>
+          <p:nvPr/>
+        </p:nvPicPr>
+        <p:blipFill>
+          <a:blip r:embed="rId2"/>
+          <a:stretch>
+            <a:fillRect/>
+          </a:stretch>
+        </p:blipFill>
+        <p:spPr>
+          <a:xfrm>
+            <a:off x="457200" y="1463040"/>
+            <a:ext cx="11247120" cy="3435003"/>
+          </a:xfrm>
+          <a:prstGeom prst="rect">
+            <a:avLst/>
+          </a:prstGeom>
+        </p:spPr>
+      </p:pic>
     </p:spTree>
   </p:cSld>
   <p:clrMapOvr>
@@ -9050,12 +9113,109 @@
       <p:grpSpPr/>
       <p:sp>
         <p:nvSpPr>
+          <p:cNvPr id="2" name="Title 1"/>
+          <p:cNvSpPr>
+            <a:spLocks noGrp="1"/>
+          </p:cNvSpPr>
+          <p:nvPr>
+            <p:ph type="title"/>
+          </p:nvPr>
+        </p:nvSpPr>
+        <p:spPr/>
+        <p:txBody>
+          <a:bodyPr/>
+          <a:lstStyle/>
+          <a:p>
+            <a:r>
+              <a:t>Workshop: 4 Hands-On Exercises</a:t>
+            </a:r>
+          </a:p>
+        </p:txBody>
+      </p:sp>
+      <p:sp>
+        <p:nvSpPr>
+          <p:cNvPr id="3" name="Content Placeholder 2"/>
+          <p:cNvSpPr>
+            <a:spLocks noGrp="1"/>
+          </p:cNvSpPr>
+          <p:nvPr>
+            <p:ph idx="1"/>
+          </p:nvPr>
+        </p:nvSpPr>
+        <p:spPr/>
+        <p:txBody>
+          <a:bodyPr/>
+          <a:lstStyle/>
+          <a:p>
+            <a:r>
+              <a:rPr sz="1600"/>
+              <a:t>Exercise 1:  How trees split - Gini impurity, information gain</a:t>
+            </a:r>
+          </a:p>
+          <a:p>
+            <a:r>
+              <a:rPr sz="1600"/>
+              <a:t>Exercise 2:  Train the tree and read the rules with plot_tree()</a:t>
+            </a:r>
+          </a:p>
+          <a:p>
+            <a:r>
+              <a:rPr sz="1600"/>
+              <a:t>Exercise 3:  Feature importance - which network features matter</a:t>
+            </a:r>
+          </a:p>
+          <a:p>
+            <a:r>
+              <a:rPr sz="1600"/>
+              <a:t>Exercise 4:  Depth sweep - find the sweet spot, see overfitting live</a:t>
+            </a:r>
+          </a:p>
+          <a:p>
+            <a:r>
+              <a:rPr sz="1600"/>
+              <a:t/>
+            </a:r>
+          </a:p>
+          <a:p>
+            <a:r>
+              <a:rPr sz="1600"/>
+              <a:t>Each exercise: lecture.md (concept) + handson.md (build it yourself)</a:t>
+            </a:r>
+          </a:p>
+          <a:p>
+            <a:r>
+              <a:rPr sz="1600"/>
+              <a:t>Solution files provided to check your work</a:t>
+            </a:r>
+          </a:p>
+        </p:txBody>
+      </p:sp>
+    </p:spTree>
+  </p:cSld>
+  <p:clrMapOvr>
+    <a:masterClrMapping/>
+  </p:clrMapOvr>
+</p:sld>
+</file>
+
+<file path=ppt/slides/slide19.xml><?xml version="1.0" encoding="utf-8"?>
+<p:sld xmlns:a="http://schemas.openxmlformats.org/drawingml/2006/main" xmlns:p="http://schemas.openxmlformats.org/presentationml/2006/main" xmlns:r="http://schemas.openxmlformats.org/officeDocument/2006/relationships">
+  <p:cSld>
+    <p:spTree>
+      <p:nvGrpSpPr>
+        <p:cNvPr id="1" name=""/>
+        <p:cNvGrpSpPr/>
+        <p:nvPr/>
+      </p:nvGrpSpPr>
+      <p:grpSpPr/>
+      <p:sp>
+        <p:nvSpPr>
           <p:cNvPr id="2" name="Text Placeholder 1"/>
           <p:cNvSpPr>
             <a:spLocks noGrp="1"/>
           </p:cNvSpPr>
           <p:nvPr>
-            <p:ph type="body" idx="13" sz="quarter"/>
+            <p:ph type="body" idx="12" sz="quarter"/>
           </p:nvPr>
         </p:nvSpPr>
         <p:spPr/>
@@ -9064,19 +9224,50 @@
           <a:lstStyle/>
           <a:p>
             <a:r>
-              <a:t>Next → Lesson 1.5: Model Evaluation</a:t>
-            </a:r>
-          </a:p>
-        </p:txBody>
-      </p:sp>
-      <p:sp>
-        <p:nvSpPr>
-          <p:cNvPr id="3" name="Text Placeholder 2"/>
+              <a:rPr sz="1500"/>
+              <a:t>Decision trees learn if/else rules from data - like a flowchart</a:t>
+            </a:r>
+          </a:p>
+          <a:p>
+            <a:r>
+              <a:rPr sz="1500"/>
+              <a:t>Gini impurity measures split quality: lower = purer = better</a:t>
+            </a:r>
+          </a:p>
+          <a:p>
+            <a:r>
+              <a:rPr sz="1500"/>
+              <a:t>Feature importance reveals which inputs the tree relies on most</a:t>
+            </a:r>
+          </a:p>
+          <a:p>
+            <a:r>
+              <a:rPr sz="1500"/>
+              <a:t>Trees handle non-linear patterns without feature scaling</a:t>
+            </a:r>
+          </a:p>
+          <a:p>
+            <a:r>
+              <a:rPr sz="1500"/>
+              <a:t>max_depth controls overfitting - find the sweet spot (usually 4-8)</a:t>
+            </a:r>
+          </a:p>
+          <a:p>
+            <a:r>
+              <a:rPr sz="1500"/>
+              <a:t>Next: Model Evaluation - why accuracy alone is dangerous in security</a:t>
+            </a:r>
+          </a:p>
+        </p:txBody>
+      </p:sp>
+      <p:sp>
+        <p:nvSpPr>
+          <p:cNvPr id="3" name="Title 2"/>
           <p:cNvSpPr>
             <a:spLocks noGrp="1"/>
           </p:cNvSpPr>
           <p:nvPr>
-            <p:ph type="body" idx="14" sz="quarter"/>
+            <p:ph type="title"/>
           </p:nvPr>
         </p:nvSpPr>
         <p:spPr/>
@@ -9085,7 +9276,12 @@
           <a:lstStyle/>
           <a:p>
             <a:r>
-              <a:t>Decision Trees</a:t>
+              <a:t>Key</a:t>
+            </a:r>
+          </a:p>
+          <a:p>
+            <a:r>
+              <a:t>Takeaways</a:t>
             </a:r>
           </a:p>
         </p:txBody>
@@ -9123,45 +9319,33 @@
           <a:bodyPr/>
           <a:lstStyle/>
           <a:p>
-            <a:pPr/>
-            <a:r>
-              <a:t>Learning rules from data — the flowchart model</a:t>
-            </a:r>
-          </a:p>
-          <a:p>
-            <a:pPr/>
-            <a:r>
-              <a:t>How splits are chosen — Gini impurity</a:t>
-            </a:r>
-          </a:p>
-          <a:p>
-            <a:pPr/>
-            <a:r>
-              <a:t>Real-life: network traffic classifier</a:t>
-            </a:r>
-          </a:p>
-          <a:p>
-            <a:pPr/>
-            <a:r>
-              <a:t>Feature importance — which features matter?</a:t>
-            </a:r>
-          </a:p>
-          <a:p>
-            <a:pPr/>
-            <a:r>
-              <a:t>Overfitting and max_depth control</a:t>
-            </a:r>
-          </a:p>
-          <a:p>
-            <a:pPr/>
-            <a:r>
-              <a:t>Why trees matter in security</a:t>
-            </a:r>
-          </a:p>
-          <a:p>
-            <a:pPr/>
-            <a:r>
-              <a:t>Workshop: 4 hands-on exercises</a:t>
+            <a:r>
+              <a:rPr sz="1600"/>
+              <a:t>How decision trees work - a flowchart of learned rules</a:t>
+            </a:r>
+          </a:p>
+          <a:p>
+            <a:r>
+              <a:rPr sz="1600"/>
+              <a:t>Gini impurity - how splits are chosen</a:t>
+            </a:r>
+          </a:p>
+          <a:p>
+            <a:r>
+              <a:rPr sz="1600"/>
+              <a:t>Network attack signatures - the security scenario</a:t>
+            </a:r>
+          </a:p>
+          <a:p>
+            <a:r>
+              <a:rPr sz="1600"/>
+              <a:t>Feature importance - which features matter most</a:t>
+            </a:r>
+          </a:p>
+          <a:p>
+            <a:r>
+              <a:rPr sz="1600"/>
+              <a:t>Overfitting and how to control it</a:t>
             </a:r>
           </a:p>
         </p:txBody>
@@ -9182,7 +9366,67 @@
           <a:lstStyle/>
           <a:p>
             <a:r>
-              <a:t>Agenda</a:t>
+              <a:t>What We'll Cover</a:t>
+            </a:r>
+          </a:p>
+        </p:txBody>
+      </p:sp>
+    </p:spTree>
+  </p:cSld>
+  <p:clrMapOvr>
+    <a:masterClrMapping/>
+  </p:clrMapOvr>
+</p:sld>
+</file>
+
+<file path=ppt/slides/slide20.xml><?xml version="1.0" encoding="utf-8"?>
+<p:sld xmlns:a="http://schemas.openxmlformats.org/drawingml/2006/main" xmlns:p="http://schemas.openxmlformats.org/presentationml/2006/main" xmlns:r="http://schemas.openxmlformats.org/officeDocument/2006/relationships">
+  <p:cSld>
+    <p:spTree>
+      <p:nvGrpSpPr>
+        <p:cNvPr id="1" name=""/>
+        <p:cNvGrpSpPr/>
+        <p:nvPr/>
+      </p:nvGrpSpPr>
+      <p:grpSpPr/>
+      <p:sp>
+        <p:nvSpPr>
+          <p:cNvPr id="2" name="Text Placeholder 1"/>
+          <p:cNvSpPr>
+            <a:spLocks noGrp="1"/>
+          </p:cNvSpPr>
+          <p:nvPr>
+            <p:ph type="body" idx="13" sz="quarter"/>
+          </p:nvPr>
+        </p:nvSpPr>
+        <p:spPr/>
+        <p:txBody>
+          <a:bodyPr/>
+          <a:lstStyle/>
+          <a:p>
+            <a:r>
+              <a:t>Next:  Lesson 1.5 - Model Evaluation</a:t>
+            </a:r>
+          </a:p>
+        </p:txBody>
+      </p:sp>
+      <p:sp>
+        <p:nvSpPr>
+          <p:cNvPr id="3" name="Text Placeholder 2"/>
+          <p:cNvSpPr>
+            <a:spLocks noGrp="1"/>
+          </p:cNvSpPr>
+          <p:nvPr>
+            <p:ph type="body" idx="14" sz="quarter"/>
+          </p:nvPr>
+        </p:nvSpPr>
+        <p:spPr/>
+        <p:txBody>
+          <a:bodyPr/>
+          <a:lstStyle/>
+          <a:p>
+            <a:r>
+              <a:t>Decision Trees</a:t>
             </a:r>
           </a:p>
         </p:txBody>
@@ -9221,12 +9465,12 @@
           <a:lstStyle/>
           <a:p>
             <a:r>
-              <a:t>Learning Rules</a:t>
-            </a:r>
-          </a:p>
-          <a:p>
-            <a:r>
-              <a:t>from Data</a:t>
+              <a:t>How Decision</a:t>
+            </a:r>
+          </a:p>
+          <a:p>
+            <a:r>
+              <a:t>Trees Work</a:t>
             </a:r>
           </a:p>
         </p:txBody>
@@ -9286,14 +9530,14 @@
           <a:lstStyle/>
           <a:p>
             <a:r>
-              <a:t>Decision Tree — A Flowchart of Learned Yes/No Questions</a:t>
+              <a:t>A Flowchart of Learned Yes/No Questions</a:t>
             </a:r>
           </a:p>
         </p:txBody>
       </p:sp>
       <p:pic>
         <p:nvPicPr>
-          <p:cNvPr id="3" name="Picture 2" descr="dt_tree.png"/>
+          <p:cNvPr id="3" name="Picture 2" descr="tree_flowchart.png"/>
           <p:cNvPicPr>
             <a:picLocks noChangeAspect="1"/>
           </p:cNvPicPr>
@@ -9307,8 +9551,8 @@
         </p:blipFill>
         <p:spPr>
           <a:xfrm>
-            <a:off x="1097280" y="1188720"/>
-            <a:ext cx="10058400" cy="5913539"/>
+            <a:off x="274320" y="1097280"/>
+            <a:ext cx="11612880" cy="5710805"/>
           </a:xfrm>
           <a:prstGeom prst="rect">
             <a:avLst/>
@@ -9349,7 +9593,7 @@
           <a:lstStyle/>
           <a:p>
             <a:r>
-              <a:t>— Interpretability is a feature</a:t>
+              <a:t/>
             </a:r>
           </a:p>
         </p:txBody>
@@ -9370,17 +9614,38 @@
           <a:lstStyle/>
           <a:p>
             <a:r>
-              <a:t>The only ML model where you</a:t>
-            </a:r>
-          </a:p>
-          <a:p>
-            <a:r>
-              <a:t>can print the learned rules</a:t>
-            </a:r>
-          </a:p>
-          <a:p>
-            <a:r>
-              <a:t>as a readable flowchart.</a:t>
+              <a:rPr sz="1400"/>
+              <a:t>A decision tree is the only</a:t>
+            </a:r>
+          </a:p>
+          <a:p>
+            <a:r>
+              <a:rPr sz="1400"/>
+              <a:t>model so far that you can</a:t>
+            </a:r>
+          </a:p>
+          <a:p>
+            <a:r>
+              <a:rPr sz="1400"/>
+              <a:t>print and read like a</a:t>
+            </a:r>
+          </a:p>
+          <a:p>
+            <a:r>
+              <a:rPr sz="1400"/>
+              <a:t>flowchart.</a:t>
+            </a:r>
+          </a:p>
+          <a:p>
+            <a:r>
+              <a:rPr sz="1400"/>
+              <a:t/>
+            </a:r>
+          </a:p>
+          <a:p>
+            <a:r>
+              <a:rPr sz="1400"/>
+              <a:t>Great for security audits.</a:t>
             </a:r>
           </a:p>
         </p:txBody>
@@ -9421,39 +9686,63 @@
           <a:bodyPr/>
           <a:lstStyle/>
           <a:p>
-            <a:pPr/>
-            <a:r>
+            <a:r>
+              <a:rPr sz="1400"/>
               <a:t>The model learns which questions to ask</a:t>
             </a:r>
           </a:p>
           <a:p>
-            <a:pPr/>
-            <a:r>
-              <a:t>And at what thresholds to split</a:t>
-            </a:r>
-          </a:p>
-          <a:p>
-            <a:pPr/>
-            <a:r>
-              <a:t>No hand-crafted rules needed</a:t>
-            </a:r>
-          </a:p>
-          <a:p>
-            <a:pPr/>
-            <a:r>
-              <a:t>The tree discovers them from data</a:t>
-            </a:r>
-          </a:p>
-          <a:p>
-            <a:pPr/>
-            <a:r>
-              <a:t>You can read the result and see exactly</a:t>
-            </a:r>
-          </a:p>
-          <a:p>
-            <a:pPr lvl="1"/>
-            <a:r>
-              <a:t>why each sample was classified</a:t>
+            <a:r>
+              <a:rPr sz="1400"/>
+              <a:t>  and at what thresholds to split</a:t>
+            </a:r>
+          </a:p>
+          <a:p>
+            <a:r>
+              <a:rPr sz="1400"/>
+              <a:t/>
+            </a:r>
+          </a:p>
+          <a:p>
+            <a:r>
+              <a:rPr sz="1400"/>
+              <a:t>No feature scaling needed</a:t>
+            </a:r>
+          </a:p>
+          <a:p>
+            <a:r>
+              <a:rPr sz="1400"/>
+              <a:t>  (unlike logistic regression)</a:t>
+            </a:r>
+          </a:p>
+          <a:p>
+            <a:r>
+              <a:rPr sz="1400"/>
+              <a:t/>
+            </a:r>
+          </a:p>
+          <a:p>
+            <a:r>
+              <a:rPr sz="1400"/>
+              <a:t>Handles non-linear patterns</a:t>
+            </a:r>
+          </a:p>
+          <a:p>
+            <a:r>
+              <a:rPr sz="1400"/>
+              <a:t>  (combinations of thresholds)</a:t>
+            </a:r>
+          </a:p>
+          <a:p>
+            <a:r>
+              <a:rPr sz="1400"/>
+              <a:t/>
+            </a:r>
+          </a:p>
+          <a:p>
+            <a:r>
+              <a:rPr sz="1400"/>
+              <a:t>The rules are human-readable</a:t>
             </a:r>
           </a:p>
         </p:txBody>
@@ -9557,14 +9846,14 @@
           <a:lstStyle/>
           <a:p>
             <a:r>
-              <a:t>Gini Impurity — Measuring Split Quality</a:t>
+              <a:t>Gini Impurity - Measuring Split Quality</a:t>
             </a:r>
           </a:p>
         </p:txBody>
       </p:sp>
       <p:pic>
         <p:nvPicPr>
-          <p:cNvPr id="3" name="Picture 2" descr="dt_gini.png"/>
+          <p:cNvPr id="3" name="Picture 2" descr="gini.png"/>
           <p:cNvPicPr>
             <a:picLocks noChangeAspect="1"/>
           </p:cNvPicPr>
@@ -9578,8 +9867,8 @@
         </p:blipFill>
         <p:spPr>
           <a:xfrm>
-            <a:off x="1097280" y="1371600"/>
-            <a:ext cx="10058400" cy="3859703"/>
+            <a:off x="457200" y="1188720"/>
+            <a:ext cx="11247120" cy="4018013"/>
           </a:xfrm>
           <a:prstGeom prst="rect">
             <a:avLst/>
@@ -9620,7 +9909,7 @@
           <a:lstStyle/>
           <a:p>
             <a:r>
-              <a:t>The Splitting Process</a:t>
+              <a:t>The Splitting Algorithm</a:t>
             </a:r>
           </a:p>
         </p:txBody>
@@ -9640,45 +9929,63 @@
           <a:bodyPr/>
           <a:lstStyle/>
           <a:p>
-            <a:pPr/>
-            <a:r>
-              <a:t>At each node, the tree tries every possible split on every feature</a:t>
-            </a:r>
-          </a:p>
-          <a:p>
-            <a:pPr/>
-            <a:r>
-              <a:t>It picks the split that reduces impurity the most</a:t>
-            </a:r>
-          </a:p>
-          <a:p>
-            <a:pPr/>
-            <a:r>
-              <a:t>Gini = 0.0 → perfectly pure node (all one class)</a:t>
-            </a:r>
-          </a:p>
-          <a:p>
-            <a:pPr/>
-            <a:r>
-              <a:t>Gini = 0.5 → worst case (50/50 mix, no information)</a:t>
-            </a:r>
-          </a:p>
-          <a:p>
-            <a:pPr/>
-            <a:r>
-              <a:t>The tree greedily picks the best split — this is called information gain</a:t>
-            </a:r>
-          </a:p>
-          <a:p>
-            <a:pPr/>
-            <a:r>
-              <a:t>Result: an automatically learned set of if/else rules</a:t>
-            </a:r>
-          </a:p>
-          <a:p>
-            <a:pPr/>
-            <a:r>
-              <a:t>No maths needed from you — sklearn handles it all</a:t>
+            <a:r>
+              <a:rPr sz="1500"/>
+              <a:t>At each node, the tree tries every possible split:</a:t>
+            </a:r>
+          </a:p>
+          <a:p>
+            <a:r>
+              <a:rPr sz="1500"/>
+              <a:t/>
+            </a:r>
+          </a:p>
+          <a:p>
+            <a:r>
+              <a:rPr sz="1500"/>
+              <a:t>  For each feature (bytes_sent, duration, ports, ...):</a:t>
+            </a:r>
+          </a:p>
+          <a:p>
+            <a:r>
+              <a:rPr sz="1500"/>
+              <a:t>    For each possible threshold value:</a:t>
+            </a:r>
+          </a:p>
+          <a:p>
+            <a:r>
+              <a:rPr sz="1500"/>
+              <a:t>      Split the data into two groups</a:t>
+            </a:r>
+          </a:p>
+          <a:p>
+            <a:r>
+              <a:rPr sz="1500"/>
+              <a:t>      Calculate Gini impurity of each group</a:t>
+            </a:r>
+          </a:p>
+          <a:p>
+            <a:r>
+              <a:rPr sz="1500"/>
+              <a:t>      Pick the split with lowest weighted Gini</a:t>
+            </a:r>
+          </a:p>
+          <a:p>
+            <a:r>
+              <a:rPr sz="1500"/>
+              <a:t/>
+            </a:r>
+          </a:p>
+          <a:p>
+            <a:r>
+              <a:rPr sz="1500"/>
+              <a:t>Repeat recursively until stopping condition is met</a:t>
+            </a:r>
+          </a:p>
+          <a:p>
+            <a:r>
+              <a:rPr sz="1500"/>
+              <a:t>  (max_depth, min_samples, or pure nodes)</a:t>
             </a:r>
           </a:p>
         </p:txBody>
@@ -9722,7 +10029,7 @@
           </a:p>
           <a:p>
             <a:r>
-              <a:t>Classifier</a:t>
+              <a:t>Classification</a:t>
             </a:r>
           </a:p>
         </p:txBody>

--- a/stage1_classic_ml/04_decision_trees/Lecture-4-Decision-Trees.pptx
+++ b/stage1_classic_ml/04_decision_trees/Lecture-4-Decision-Trees.pptx
@@ -8313,6 +8313,9 @@
           <a:lstStyle/>
           <a:p>
             <a:r>
+              <a:rPr>
+                <a:latin typeface="Calibri"/>
+              </a:rPr>
               <a:t>AI Basic Training</a:t>
             </a:r>
           </a:p>
@@ -8334,6 +8337,9 @@
           <a:lstStyle/>
           <a:p>
             <a:r>
+              <a:rPr>
+                <a:latin typeface="Calibri"/>
+              </a:rPr>
               <a:t>Lesson 1.4  |  Stage 1: Classic Machine Learning</a:t>
             </a:r>
           </a:p>
@@ -8355,6 +8361,9 @@
           <a:lstStyle/>
           <a:p>
             <a:r>
+              <a:rPr b="1">
+                <a:latin typeface="Calibri"/>
+              </a:rPr>
               <a:t>Decision Trees</a:t>
             </a:r>
           </a:p>
@@ -8376,6 +8385,9 @@
           <a:lstStyle/>
           <a:p>
             <a:r>
+              <a:rPr>
+                <a:latin typeface="Calibri"/>
+              </a:rPr>
               <a:t>Learning Rules from Data  -  Network Traffic Classification</a:t>
             </a:r>
           </a:p>
@@ -8415,6 +8427,9 @@
           <a:lstStyle/>
           <a:p>
             <a:r>
+              <a:rPr b="1">
+                <a:latin typeface="Calibri"/>
+              </a:rPr>
               <a:t>Three Attack Types - Distinct Feature Signatures</a:t>
             </a:r>
           </a:p>
@@ -8478,6 +8493,9 @@
           <a:lstStyle/>
           <a:p>
             <a:r>
+              <a:rPr b="1">
+                <a:latin typeface="Calibri"/>
+              </a:rPr>
               <a:t>Feature Importance - Which Network Features Matter Most?</a:t>
             </a:r>
           </a:p>
@@ -8541,6 +8559,9 @@
           <a:lstStyle/>
           <a:p>
             <a:r>
+              <a:rPr b="1">
+                <a:latin typeface="Calibri"/>
+              </a:rPr>
               <a:t>The Code - Training and Visualising the Tree</a:t>
             </a:r>
           </a:p>
@@ -8562,73 +8583,97 @@
           <a:lstStyle/>
           <a:p>
             <a:r>
-              <a:rPr sz="1500"/>
+              <a:rPr sz="1500">
+                <a:latin typeface="Calibri"/>
+              </a:rPr>
               <a:t>from sklearn.tree import DecisionTreeClassifier, plot_tree</a:t>
             </a:r>
           </a:p>
           <a:p>
             <a:r>
-              <a:rPr sz="1500"/>
+              <a:rPr sz="1500">
+                <a:latin typeface="Calibri"/>
+              </a:rPr>
               <a:t/>
             </a:r>
           </a:p>
           <a:p>
             <a:r>
-              <a:rPr sz="1500"/>
+              <a:rPr sz="1500">
+                <a:latin typeface="Calibri"/>
+              </a:rPr>
               <a:t>model = DecisionTreeClassifier(max_depth=4, random_state=42)</a:t>
             </a:r>
           </a:p>
           <a:p>
             <a:r>
-              <a:rPr sz="1500"/>
+              <a:rPr sz="1500">
+                <a:latin typeface="Calibri"/>
+              </a:rPr>
               <a:t>model.fit(X_train, y_train)</a:t>
             </a:r>
           </a:p>
           <a:p>
             <a:r>
-              <a:rPr sz="1500"/>
+              <a:rPr sz="1500">
+                <a:latin typeface="Calibri"/>
+              </a:rPr>
               <a:t/>
             </a:r>
           </a:p>
           <a:p>
             <a:r>
-              <a:rPr sz="1500"/>
+              <a:rPr sz="1500">
+                <a:latin typeface="Calibri"/>
+              </a:rPr>
               <a:t># See the actual rules the model learned:</a:t>
             </a:r>
           </a:p>
           <a:p>
             <a:r>
-              <a:rPr sz="1500"/>
+              <a:rPr sz="1500">
+                <a:latin typeface="Calibri"/>
+              </a:rPr>
               <a:t>plot_tree(model, feature_names=feature_names,</a:t>
             </a:r>
           </a:p>
           <a:p>
             <a:r>
-              <a:rPr sz="1500"/>
+              <a:rPr sz="1500">
+                <a:latin typeface="Calibri"/>
+              </a:rPr>
               <a:t>          class_names=['Benign','PortScan','Exfil','DoS'],</a:t>
             </a:r>
           </a:p>
           <a:p>
             <a:r>
-              <a:rPr sz="1500"/>
+              <a:rPr sz="1500">
+                <a:latin typeface="Calibri"/>
+              </a:rPr>
               <a:t>          filled=True, fontsize=8)</a:t>
             </a:r>
           </a:p>
           <a:p>
             <a:r>
-              <a:rPr sz="1500"/>
+              <a:rPr sz="1500">
+                <a:latin typeface="Calibri"/>
+              </a:rPr>
               <a:t/>
             </a:r>
           </a:p>
           <a:p>
             <a:r>
-              <a:rPr sz="1500"/>
+              <a:rPr sz="1500">
+                <a:latin typeface="Calibri"/>
+              </a:rPr>
               <a:t># Which features matter most?</a:t>
             </a:r>
           </a:p>
           <a:p>
             <a:r>
-              <a:rPr sz="1500"/>
+              <a:rPr sz="1500">
+                <a:latin typeface="Calibri"/>
+              </a:rPr>
               <a:t>print(model.feature_importances_)</a:t>
             </a:r>
           </a:p>
@@ -8668,11 +8713,17 @@
           <a:lstStyle/>
           <a:p>
             <a:r>
+              <a:rPr b="1">
+                <a:latin typeface="Calibri"/>
+              </a:rPr>
               <a:t>Overfitting and</a:t>
             </a:r>
           </a:p>
           <a:p>
             <a:r>
+              <a:rPr b="1">
+                <a:latin typeface="Calibri"/>
+              </a:rPr>
               <a:t>How to Control It</a:t>
             </a:r>
           </a:p>
@@ -8694,6 +8745,9 @@
           <a:lstStyle/>
           <a:p>
             <a:r>
+              <a:rPr b="1">
+                <a:latin typeface="Calibri"/>
+              </a:rPr>
               <a:t>04</a:t>
             </a:r>
           </a:p>
@@ -8733,6 +8787,9 @@
           <a:lstStyle/>
           <a:p>
             <a:r>
+              <a:rPr b="1">
+                <a:latin typeface="Calibri"/>
+              </a:rPr>
               <a:t>Train vs Test Accuracy at Different Depths</a:t>
             </a:r>
           </a:p>
@@ -8796,6 +8853,9 @@
           <a:lstStyle/>
           <a:p>
             <a:r>
+              <a:rPr b="1">
+                <a:latin typeface="Calibri"/>
+              </a:rPr>
               <a:t>Two Controls to Prevent Overfitting</a:t>
             </a:r>
           </a:p>
@@ -8817,67 +8877,89 @@
           <a:lstStyle/>
           <a:p>
             <a:r>
-              <a:rPr sz="1400"/>
+              <a:rPr sz="1400">
+                <a:latin typeface="Calibri"/>
+              </a:rPr>
               <a:t>max_depth</a:t>
             </a:r>
           </a:p>
           <a:p>
             <a:r>
-              <a:rPr sz="1400"/>
+              <a:rPr sz="1400">
+                <a:latin typeface="Calibri"/>
+              </a:rPr>
               <a:t/>
             </a:r>
           </a:p>
           <a:p>
             <a:r>
-              <a:rPr sz="1400"/>
+              <a:rPr sz="1400">
+                <a:latin typeface="Calibri"/>
+              </a:rPr>
               <a:t>Limits how deep the tree grows</a:t>
             </a:r>
           </a:p>
           <a:p>
             <a:r>
-              <a:rPr sz="1400"/>
+              <a:rPr sz="1400">
+                <a:latin typeface="Calibri"/>
+              </a:rPr>
               <a:t/>
             </a:r>
           </a:p>
           <a:p>
             <a:r>
-              <a:rPr sz="1400"/>
+              <a:rPr sz="1400">
+                <a:latin typeface="Calibri"/>
+              </a:rPr>
               <a:t>Low depth (2-3):</a:t>
             </a:r>
           </a:p>
           <a:p>
             <a:r>
-              <a:rPr sz="1400"/>
+              <a:rPr sz="1400">
+                <a:latin typeface="Calibri"/>
+              </a:rPr>
               <a:t>  Simple, may underfit</a:t>
             </a:r>
           </a:p>
           <a:p>
             <a:r>
-              <a:rPr sz="1400"/>
+              <a:rPr sz="1400">
+                <a:latin typeface="Calibri"/>
+              </a:rPr>
               <a:t/>
             </a:r>
           </a:p>
           <a:p>
             <a:r>
-              <a:rPr sz="1400"/>
+              <a:rPr sz="1400">
+                <a:latin typeface="Calibri"/>
+              </a:rPr>
               <a:t>High depth (15+):</a:t>
             </a:r>
           </a:p>
           <a:p>
             <a:r>
-              <a:rPr sz="1400"/>
+              <a:rPr sz="1400">
+                <a:latin typeface="Calibri"/>
+              </a:rPr>
               <a:t>  Complex, will overfit</a:t>
             </a:r>
           </a:p>
           <a:p>
             <a:r>
-              <a:rPr sz="1400"/>
+              <a:rPr sz="1400">
+                <a:latin typeface="Calibri"/>
+              </a:rPr>
               <a:t/>
             </a:r>
           </a:p>
           <a:p>
             <a:r>
-              <a:rPr sz="1400"/>
+              <a:rPr sz="1400">
+                <a:latin typeface="Calibri"/>
+              </a:rPr>
               <a:t>Sweet spot: usually 4-8</a:t>
             </a:r>
           </a:p>
@@ -8899,67 +8981,89 @@
           <a:lstStyle/>
           <a:p>
             <a:r>
-              <a:rPr sz="1400"/>
+              <a:rPr sz="1400">
+                <a:latin typeface="Calibri"/>
+              </a:rPr>
               <a:t>min_samples_split</a:t>
             </a:r>
           </a:p>
           <a:p>
             <a:r>
-              <a:rPr sz="1400"/>
+              <a:rPr sz="1400">
+                <a:latin typeface="Calibri"/>
+              </a:rPr>
               <a:t/>
             </a:r>
           </a:p>
           <a:p>
             <a:r>
-              <a:rPr sz="1400"/>
+              <a:rPr sz="1400">
+                <a:latin typeface="Calibri"/>
+              </a:rPr>
               <a:t>Minimum samples to split a node</a:t>
             </a:r>
           </a:p>
           <a:p>
             <a:r>
-              <a:rPr sz="1400"/>
+              <a:rPr sz="1400">
+                <a:latin typeface="Calibri"/>
+              </a:rPr>
               <a:t/>
             </a:r>
           </a:p>
           <a:p>
             <a:r>
-              <a:rPr sz="1400"/>
+              <a:rPr sz="1400">
+                <a:latin typeface="Calibri"/>
+              </a:rPr>
               <a:t>High value (50+):</a:t>
             </a:r>
           </a:p>
           <a:p>
             <a:r>
-              <a:rPr sz="1400"/>
+              <a:rPr sz="1400">
+                <a:latin typeface="Calibri"/>
+              </a:rPr>
               <a:t>  Prevents tiny leaf nodes</a:t>
             </a:r>
           </a:p>
           <a:p>
             <a:r>
-              <a:rPr sz="1400"/>
+              <a:rPr sz="1400">
+                <a:latin typeface="Calibri"/>
+              </a:rPr>
               <a:t>  More generalisation</a:t>
             </a:r>
           </a:p>
           <a:p>
             <a:r>
-              <a:rPr sz="1400"/>
+              <a:rPr sz="1400">
+                <a:latin typeface="Calibri"/>
+              </a:rPr>
               <a:t/>
             </a:r>
           </a:p>
           <a:p>
             <a:r>
-              <a:rPr sz="1400"/>
+              <a:rPr sz="1400">
+                <a:latin typeface="Calibri"/>
+              </a:rPr>
               <a:t>Default is 2 (very permissive)</a:t>
             </a:r>
           </a:p>
           <a:p>
             <a:r>
-              <a:rPr sz="1400"/>
+              <a:rPr sz="1400">
+                <a:latin typeface="Calibri"/>
+              </a:rPr>
               <a:t/>
             </a:r>
           </a:p>
           <a:p>
             <a:r>
-              <a:rPr sz="1400"/>
+              <a:rPr sz="1400">
+                <a:latin typeface="Calibri"/>
+              </a:rPr>
               <a:t>Try 10-50 for security data</a:t>
             </a:r>
           </a:p>
@@ -8999,11 +9103,17 @@
           <a:lstStyle/>
           <a:p>
             <a:r>
+              <a:rPr b="1">
+                <a:latin typeface="Calibri"/>
+              </a:rPr>
               <a:t>Comparison</a:t>
             </a:r>
           </a:p>
           <a:p>
             <a:r>
+              <a:rPr b="1">
+                <a:latin typeface="Calibri"/>
+              </a:rPr>
               <a:t>and Next Steps</a:t>
             </a:r>
           </a:p>
@@ -9025,6 +9135,9 @@
           <a:lstStyle/>
           <a:p>
             <a:r>
+              <a:rPr b="1">
+                <a:latin typeface="Calibri"/>
+              </a:rPr>
               <a:t>05</a:t>
             </a:r>
           </a:p>
@@ -9064,6 +9177,9 @@
           <a:lstStyle/>
           <a:p>
             <a:r>
+              <a:rPr b="1">
+                <a:latin typeface="Calibri"/>
+              </a:rPr>
               <a:t>How Decision Trees Compare to Previous Models</a:t>
             </a:r>
           </a:p>
@@ -9127,6 +9243,9 @@
           <a:lstStyle/>
           <a:p>
             <a:r>
+              <a:rPr b="1">
+                <a:latin typeface="Calibri"/>
+              </a:rPr>
               <a:t>Workshop: 4 Hands-On Exercises</a:t>
             </a:r>
           </a:p>
@@ -9148,43 +9267,57 @@
           <a:lstStyle/>
           <a:p>
             <a:r>
-              <a:rPr sz="1600"/>
+              <a:rPr sz="1600">
+                <a:latin typeface="Calibri"/>
+              </a:rPr>
               <a:t>Exercise 1:  How trees split - Gini impurity, information gain</a:t>
             </a:r>
           </a:p>
           <a:p>
             <a:r>
-              <a:rPr sz="1600"/>
+              <a:rPr sz="1600">
+                <a:latin typeface="Calibri"/>
+              </a:rPr>
               <a:t>Exercise 2:  Train the tree and read the rules with plot_tree()</a:t>
             </a:r>
           </a:p>
           <a:p>
             <a:r>
-              <a:rPr sz="1600"/>
+              <a:rPr sz="1600">
+                <a:latin typeface="Calibri"/>
+              </a:rPr>
               <a:t>Exercise 3:  Feature importance - which network features matter</a:t>
             </a:r>
           </a:p>
           <a:p>
             <a:r>
-              <a:rPr sz="1600"/>
+              <a:rPr sz="1600">
+                <a:latin typeface="Calibri"/>
+              </a:rPr>
               <a:t>Exercise 4:  Depth sweep - find the sweet spot, see overfitting live</a:t>
             </a:r>
           </a:p>
           <a:p>
             <a:r>
-              <a:rPr sz="1600"/>
+              <a:rPr sz="1600">
+                <a:latin typeface="Calibri"/>
+              </a:rPr>
               <a:t/>
             </a:r>
           </a:p>
           <a:p>
             <a:r>
-              <a:rPr sz="1600"/>
+              <a:rPr sz="1600">
+                <a:latin typeface="Calibri"/>
+              </a:rPr>
               <a:t>Each exercise: lecture.md (concept) + handson.md (build it yourself)</a:t>
             </a:r>
           </a:p>
           <a:p>
             <a:r>
-              <a:rPr sz="1600"/>
+              <a:rPr sz="1600">
+                <a:latin typeface="Calibri"/>
+              </a:rPr>
               <a:t>Solution files provided to check your work</a:t>
             </a:r>
           </a:p>
@@ -9224,37 +9357,49 @@
           <a:lstStyle/>
           <a:p>
             <a:r>
-              <a:rPr sz="1500"/>
+              <a:rPr sz="1500">
+                <a:latin typeface="Calibri"/>
+              </a:rPr>
               <a:t>Decision trees learn if/else rules from data - like a flowchart</a:t>
             </a:r>
           </a:p>
           <a:p>
             <a:r>
-              <a:rPr sz="1500"/>
+              <a:rPr sz="1500">
+                <a:latin typeface="Calibri"/>
+              </a:rPr>
               <a:t>Gini impurity measures split quality: lower = purer = better</a:t>
             </a:r>
           </a:p>
           <a:p>
             <a:r>
-              <a:rPr sz="1500"/>
+              <a:rPr sz="1500">
+                <a:latin typeface="Calibri"/>
+              </a:rPr>
               <a:t>Feature importance reveals which inputs the tree relies on most</a:t>
             </a:r>
           </a:p>
           <a:p>
             <a:r>
-              <a:rPr sz="1500"/>
+              <a:rPr sz="1500">
+                <a:latin typeface="Calibri"/>
+              </a:rPr>
               <a:t>Trees handle non-linear patterns without feature scaling</a:t>
             </a:r>
           </a:p>
           <a:p>
             <a:r>
-              <a:rPr sz="1500"/>
+              <a:rPr sz="1500">
+                <a:latin typeface="Calibri"/>
+              </a:rPr>
               <a:t>max_depth controls overfitting - find the sweet spot (usually 4-8)</a:t>
             </a:r>
           </a:p>
           <a:p>
             <a:r>
-              <a:rPr sz="1500"/>
+              <a:rPr sz="1500">
+                <a:latin typeface="Calibri"/>
+              </a:rPr>
               <a:t>Next: Model Evaluation - why accuracy alone is dangerous in security</a:t>
             </a:r>
           </a:p>
@@ -9276,11 +9421,17 @@
           <a:lstStyle/>
           <a:p>
             <a:r>
+              <a:rPr b="1">
+                <a:latin typeface="Calibri"/>
+              </a:rPr>
               <a:t>Key</a:t>
             </a:r>
           </a:p>
           <a:p>
             <a:r>
+              <a:rPr b="1">
+                <a:latin typeface="Calibri"/>
+              </a:rPr>
               <a:t>Takeaways</a:t>
             </a:r>
           </a:p>
@@ -9320,31 +9471,41 @@
           <a:lstStyle/>
           <a:p>
             <a:r>
-              <a:rPr sz="1600"/>
+              <a:rPr sz="1600">
+                <a:latin typeface="Calibri"/>
+              </a:rPr>
               <a:t>How decision trees work - a flowchart of learned rules</a:t>
             </a:r>
           </a:p>
           <a:p>
             <a:r>
-              <a:rPr sz="1600"/>
+              <a:rPr sz="1600">
+                <a:latin typeface="Calibri"/>
+              </a:rPr>
               <a:t>Gini impurity - how splits are chosen</a:t>
             </a:r>
           </a:p>
           <a:p>
             <a:r>
-              <a:rPr sz="1600"/>
+              <a:rPr sz="1600">
+                <a:latin typeface="Calibri"/>
+              </a:rPr>
               <a:t>Network attack signatures - the security scenario</a:t>
             </a:r>
           </a:p>
           <a:p>
             <a:r>
-              <a:rPr sz="1600"/>
+              <a:rPr sz="1600">
+                <a:latin typeface="Calibri"/>
+              </a:rPr>
               <a:t>Feature importance - which features matter most</a:t>
             </a:r>
           </a:p>
           <a:p>
             <a:r>
-              <a:rPr sz="1600"/>
+              <a:rPr sz="1600">
+                <a:latin typeface="Calibri"/>
+              </a:rPr>
               <a:t>Overfitting and how to control it</a:t>
             </a:r>
           </a:p>
@@ -9366,6 +9527,9 @@
           <a:lstStyle/>
           <a:p>
             <a:r>
+              <a:rPr b="1">
+                <a:latin typeface="Calibri"/>
+              </a:rPr>
               <a:t>What We'll Cover</a:t>
             </a:r>
           </a:p>
@@ -9405,6 +9569,9 @@
           <a:lstStyle/>
           <a:p>
             <a:r>
+              <a:rPr>
+                <a:latin typeface="Calibri"/>
+              </a:rPr>
               <a:t>Next:  Lesson 1.5 - Model Evaluation</a:t>
             </a:r>
           </a:p>
@@ -9426,6 +9593,9 @@
           <a:lstStyle/>
           <a:p>
             <a:r>
+              <a:rPr b="1">
+                <a:latin typeface="Calibri"/>
+              </a:rPr>
               <a:t>Decision Trees</a:t>
             </a:r>
           </a:p>
@@ -9465,11 +9635,17 @@
           <a:lstStyle/>
           <a:p>
             <a:r>
+              <a:rPr b="1">
+                <a:latin typeface="Calibri"/>
+              </a:rPr>
               <a:t>How Decision</a:t>
             </a:r>
           </a:p>
           <a:p>
             <a:r>
+              <a:rPr b="1">
+                <a:latin typeface="Calibri"/>
+              </a:rPr>
               <a:t>Trees Work</a:t>
             </a:r>
           </a:p>
@@ -9491,6 +9667,9 @@
           <a:lstStyle/>
           <a:p>
             <a:r>
+              <a:rPr b="1">
+                <a:latin typeface="Calibri"/>
+              </a:rPr>
               <a:t>01</a:t>
             </a:r>
           </a:p>
@@ -9530,6 +9709,9 @@
           <a:lstStyle/>
           <a:p>
             <a:r>
+              <a:rPr b="1">
+                <a:latin typeface="Calibri"/>
+              </a:rPr>
               <a:t>A Flowchart of Learned Yes/No Questions</a:t>
             </a:r>
           </a:p>
@@ -9593,6 +9775,9 @@
           <a:lstStyle/>
           <a:p>
             <a:r>
+              <a:rPr>
+                <a:latin typeface="Calibri"/>
+              </a:rPr>
               <a:t/>
             </a:r>
           </a:p>
@@ -9614,37 +9799,49 @@
           <a:lstStyle/>
           <a:p>
             <a:r>
-              <a:rPr sz="1400"/>
+              <a:rPr sz="1400">
+                <a:latin typeface="Calibri"/>
+              </a:rPr>
               <a:t>A decision tree is the only</a:t>
             </a:r>
           </a:p>
           <a:p>
             <a:r>
-              <a:rPr sz="1400"/>
+              <a:rPr sz="1400">
+                <a:latin typeface="Calibri"/>
+              </a:rPr>
               <a:t>model so far that you can</a:t>
             </a:r>
           </a:p>
           <a:p>
             <a:r>
-              <a:rPr sz="1400"/>
+              <a:rPr sz="1400">
+                <a:latin typeface="Calibri"/>
+              </a:rPr>
               <a:t>print and read like a</a:t>
             </a:r>
           </a:p>
           <a:p>
             <a:r>
-              <a:rPr sz="1400"/>
+              <a:rPr sz="1400">
+                <a:latin typeface="Calibri"/>
+              </a:rPr>
               <a:t>flowchart.</a:t>
             </a:r>
           </a:p>
           <a:p>
             <a:r>
-              <a:rPr sz="1400"/>
+              <a:rPr sz="1400">
+                <a:latin typeface="Calibri"/>
+              </a:rPr>
               <a:t/>
             </a:r>
           </a:p>
           <a:p>
             <a:r>
-              <a:rPr sz="1400"/>
+              <a:rPr sz="1400">
+                <a:latin typeface="Calibri"/>
+              </a:rPr>
               <a:t>Great for security audits.</a:t>
             </a:r>
           </a:p>
@@ -9666,6 +9863,9 @@
           <a:lstStyle/>
           <a:p>
             <a:r>
+              <a:rPr b="1">
+                <a:latin typeface="Calibri"/>
+              </a:rPr>
               <a:t>What Makes Trees Special</a:t>
             </a:r>
           </a:p>
@@ -9687,61 +9887,81 @@
           <a:lstStyle/>
           <a:p>
             <a:r>
-              <a:rPr sz="1400"/>
+              <a:rPr sz="1400">
+                <a:latin typeface="Calibri"/>
+              </a:rPr>
               <a:t>The model learns which questions to ask</a:t>
             </a:r>
           </a:p>
           <a:p>
             <a:r>
-              <a:rPr sz="1400"/>
+              <a:rPr sz="1400">
+                <a:latin typeface="Calibri"/>
+              </a:rPr>
               <a:t>  and at what thresholds to split</a:t>
             </a:r>
           </a:p>
           <a:p>
             <a:r>
-              <a:rPr sz="1400"/>
+              <a:rPr sz="1400">
+                <a:latin typeface="Calibri"/>
+              </a:rPr>
               <a:t/>
             </a:r>
           </a:p>
           <a:p>
             <a:r>
-              <a:rPr sz="1400"/>
+              <a:rPr sz="1400">
+                <a:latin typeface="Calibri"/>
+              </a:rPr>
               <a:t>No feature scaling needed</a:t>
             </a:r>
           </a:p>
           <a:p>
             <a:r>
-              <a:rPr sz="1400"/>
+              <a:rPr sz="1400">
+                <a:latin typeface="Calibri"/>
+              </a:rPr>
               <a:t>  (unlike logistic regression)</a:t>
             </a:r>
           </a:p>
           <a:p>
             <a:r>
-              <a:rPr sz="1400"/>
+              <a:rPr sz="1400">
+                <a:latin typeface="Calibri"/>
+              </a:rPr>
               <a:t/>
             </a:r>
           </a:p>
           <a:p>
             <a:r>
-              <a:rPr sz="1400"/>
+              <a:rPr sz="1400">
+                <a:latin typeface="Calibri"/>
+              </a:rPr>
               <a:t>Handles non-linear patterns</a:t>
             </a:r>
           </a:p>
           <a:p>
             <a:r>
-              <a:rPr sz="1400"/>
+              <a:rPr sz="1400">
+                <a:latin typeface="Calibri"/>
+              </a:rPr>
               <a:t>  (combinations of thresholds)</a:t>
             </a:r>
           </a:p>
           <a:p>
             <a:r>
-              <a:rPr sz="1400"/>
+              <a:rPr sz="1400">
+                <a:latin typeface="Calibri"/>
+              </a:rPr>
               <a:t/>
             </a:r>
           </a:p>
           <a:p>
             <a:r>
-              <a:rPr sz="1400"/>
+              <a:rPr sz="1400">
+                <a:latin typeface="Calibri"/>
+              </a:rPr>
               <a:t>The rules are human-readable</a:t>
             </a:r>
           </a:p>
@@ -9781,11 +10001,17 @@
           <a:lstStyle/>
           <a:p>
             <a:r>
+              <a:rPr b="1">
+                <a:latin typeface="Calibri"/>
+              </a:rPr>
               <a:t>How Splits</a:t>
             </a:r>
           </a:p>
           <a:p>
             <a:r>
+              <a:rPr b="1">
+                <a:latin typeface="Calibri"/>
+              </a:rPr>
               <a:t>Are Chosen</a:t>
             </a:r>
           </a:p>
@@ -9807,6 +10033,9 @@
           <a:lstStyle/>
           <a:p>
             <a:r>
+              <a:rPr b="1">
+                <a:latin typeface="Calibri"/>
+              </a:rPr>
               <a:t>02</a:t>
             </a:r>
           </a:p>
@@ -9846,6 +10075,9 @@
           <a:lstStyle/>
           <a:p>
             <a:r>
+              <a:rPr b="1">
+                <a:latin typeface="Calibri"/>
+              </a:rPr>
               <a:t>Gini Impurity - Measuring Split Quality</a:t>
             </a:r>
           </a:p>
@@ -9909,6 +10141,9 @@
           <a:lstStyle/>
           <a:p>
             <a:r>
+              <a:rPr b="1">
+                <a:latin typeface="Calibri"/>
+              </a:rPr>
               <a:t>The Splitting Algorithm</a:t>
             </a:r>
           </a:p>
@@ -9930,61 +10165,81 @@
           <a:lstStyle/>
           <a:p>
             <a:r>
-              <a:rPr sz="1500"/>
+              <a:rPr sz="1500">
+                <a:latin typeface="Calibri"/>
+              </a:rPr>
               <a:t>At each node, the tree tries every possible split:</a:t>
             </a:r>
           </a:p>
           <a:p>
             <a:r>
-              <a:rPr sz="1500"/>
+              <a:rPr sz="1500">
+                <a:latin typeface="Calibri"/>
+              </a:rPr>
               <a:t/>
             </a:r>
           </a:p>
           <a:p>
             <a:r>
-              <a:rPr sz="1500"/>
+              <a:rPr sz="1500">
+                <a:latin typeface="Calibri"/>
+              </a:rPr>
               <a:t>  For each feature (bytes_sent, duration, ports, ...):</a:t>
             </a:r>
           </a:p>
           <a:p>
             <a:r>
-              <a:rPr sz="1500"/>
+              <a:rPr sz="1500">
+                <a:latin typeface="Calibri"/>
+              </a:rPr>
               <a:t>    For each possible threshold value:</a:t>
             </a:r>
           </a:p>
           <a:p>
             <a:r>
-              <a:rPr sz="1500"/>
+              <a:rPr sz="1500">
+                <a:latin typeface="Calibri"/>
+              </a:rPr>
               <a:t>      Split the data into two groups</a:t>
             </a:r>
           </a:p>
           <a:p>
             <a:r>
-              <a:rPr sz="1500"/>
+              <a:rPr sz="1500">
+                <a:latin typeface="Calibri"/>
+              </a:rPr>
               <a:t>      Calculate Gini impurity of each group</a:t>
             </a:r>
           </a:p>
           <a:p>
             <a:r>
-              <a:rPr sz="1500"/>
+              <a:rPr sz="1500">
+                <a:latin typeface="Calibri"/>
+              </a:rPr>
               <a:t>      Pick the split with lowest weighted Gini</a:t>
             </a:r>
           </a:p>
           <a:p>
             <a:r>
-              <a:rPr sz="1500"/>
+              <a:rPr sz="1500">
+                <a:latin typeface="Calibri"/>
+              </a:rPr>
               <a:t/>
             </a:r>
           </a:p>
           <a:p>
             <a:r>
-              <a:rPr sz="1500"/>
+              <a:rPr sz="1500">
+                <a:latin typeface="Calibri"/>
+              </a:rPr>
               <a:t>Repeat recursively until stopping condition is met</a:t>
             </a:r>
           </a:p>
           <a:p>
             <a:r>
-              <a:rPr sz="1500"/>
+              <a:rPr sz="1500">
+                <a:latin typeface="Calibri"/>
+              </a:rPr>
               <a:t>  (max_depth, min_samples, or pure nodes)</a:t>
             </a:r>
           </a:p>
@@ -10024,11 +10279,17 @@
           <a:lstStyle/>
           <a:p>
             <a:r>
+              <a:rPr b="1">
+                <a:latin typeface="Calibri"/>
+              </a:rPr>
               <a:t>Network Traffic</a:t>
             </a:r>
           </a:p>
           <a:p>
             <a:r>
+              <a:rPr b="1">
+                <a:latin typeface="Calibri"/>
+              </a:rPr>
               <a:t>Classification</a:t>
             </a:r>
           </a:p>
@@ -10050,6 +10311,9 @@
           <a:lstStyle/>
           <a:p>
             <a:r>
+              <a:rPr b="1">
+                <a:latin typeface="Calibri"/>
+              </a:rPr>
               <a:t>03</a:t>
             </a:r>
           </a:p>
